--- a/Topic_E/Exam_Practice/TE-L03_Speaking_Workshop_Culture_and_Personal_Identity.pptx
+++ b/Topic_E/Exam_Practice/TE-L03_Speaking_Workshop_Culture_and_Personal_Identity.pptx
@@ -615,7 +615,11 @@
           <a:lstStyle/>
           <a:p>
             <a:r>
-              <a:rPr lang="en-US" dirty="0"/>
+              <a:rPr lang="ar-SA" dirty="0">
+                <a:latin typeface="Amiri" pitchFamily="2" charset="-78"/>
+                <a:ea typeface="Amiri" pitchFamily="2" charset="-78"/>
+                <a:cs typeface="Amiri" pitchFamily="2" charset="-78"/>
+              </a:rPr>
               <a:t>ROLE PLAY C (Develop) — a youth podcast.
 SET-UP IN THE BREAKOUT ROOM: A = examiner (reads the left column ONLY — the questions, in order), B = candidate (sees the task column; Core may use the help column), C = observer (ticks the feedback checklist). 1 minute preparation, about 3 minutes speaking, 1 minute feedback, then rotate.
 Task ! is the unexpected question: in the exam the candidate has not seen it — the examiner should read it without warning.
@@ -707,7 +711,11 @@
           <a:lstStyle/>
           <a:p>
             <a:r>
-              <a:rPr lang="en-US" dirty="0"/>
+              <a:rPr lang="ar-SA" dirty="0">
+                <a:latin typeface="Amiri" pitchFamily="2" charset="-78"/>
+                <a:ea typeface="Amiri" pitchFamily="2" charset="-78"/>
+                <a:cs typeface="Amiri" pitchFamily="2" charset="-78"/>
+              </a:rPr>
               <a:t>ROLE PLAY D (Stretch) — a televised debate.
 SET-UP IN THE BREAKOUT ROOM: A = examiner (reads the left column ONLY — the questions, in order), B = candidate (sees the task column; Core may use the help column), C = observer (ticks the feedback checklist). 1 minute preparation, about 3 minutes speaking, 1 minute feedback, then rotate.
 Task ! is the unexpected question: in the exam the candidate has not seen it — the examiner should read it without warning.
@@ -1243,7 +1251,11 @@
           <a:lstStyle/>
           <a:p>
             <a:r>
-              <a:rPr lang="en-US" dirty="0"/>
+              <a:rPr lang="ar-SA" dirty="0">
+                <a:latin typeface="Amiri" pitchFamily="2" charset="-78"/>
+                <a:ea typeface="Amiri" pitchFamily="2" charset="-78"/>
+                <a:cs typeface="Amiri" pitchFamily="2" charset="-78"/>
+              </a:rPr>
               <a:t>TOPIC CONVERSATION — Core. Examiner asks the questions in order and may add “لِمَاذَا؟ / هَلْ يُمْكِنُ أَنْ تَشْرَحَ أَكْثَرَ؟” to push for more. Candidate aims for one full sentence per question.
 </a:t>
             </a:r>
@@ -1332,7 +1344,11 @@
           <a:lstStyle/>
           <a:p>
             <a:r>
-              <a:rPr lang="en-US" dirty="0"/>
+              <a:rPr lang="ar-SA" dirty="0">
+                <a:latin typeface="Amiri" pitchFamily="2" charset="-78"/>
+                <a:ea typeface="Amiri" pitchFamily="2" charset="-78"/>
+                <a:cs typeface="Amiri" pitchFamily="2" charset="-78"/>
+              </a:rPr>
               <a:t>TOPIC CONVERSATION — Develop. Examiner asks the questions in order and may add “لِمَاذَا؟ / هَلْ يُمْكِنُ أَنْ تَشْرَحَ أَكْثَرَ؟” to push for more. Candidate aims for two or three sentences, with a reason and an example.
 </a:t>
             </a:r>
@@ -1421,7 +1437,11 @@
           <a:lstStyle/>
           <a:p>
             <a:r>
-              <a:rPr lang="en-US" dirty="0"/>
+              <a:rPr lang="ar-SA" dirty="0">
+                <a:latin typeface="Amiri" pitchFamily="2" charset="-78"/>
+                <a:ea typeface="Amiri" pitchFamily="2" charset="-78"/>
+                <a:cs typeface="Amiri" pitchFamily="2" charset="-78"/>
+              </a:rPr>
               <a:t>TOPIC CONVERSATION — Stretch. Examiner asks the questions in order and may add “لِمَاذَا؟ / هَلْ يُمْكِنُ أَنْ تَشْرَحَ أَكْثَرَ؟” to push for more. Candidate aims for a developed answer: opinion, balance, concession and a conditional.
 </a:t>
             </a:r>
@@ -1510,7 +1530,11 @@
           <a:lstStyle/>
           <a:p>
             <a:r>
-              <a:rPr lang="en-US" dirty="0"/>
+              <a:rPr lang="ar-SA" dirty="0">
+                <a:latin typeface="Amiri" pitchFamily="2" charset="-78"/>
+                <a:ea typeface="Amiri" pitchFamily="2" charset="-78"/>
+                <a:cs typeface="Amiri" pitchFamily="2" charset="-78"/>
+              </a:rPr>
               <a:t>WELCOME (1 min) — while students join.
 • Greet each student by name as they arrive: السَّلَامُ عَلَيْكُمْ. Take the register (Pastoral Tracker: attendance 0/1).
 • 2-MINUTE CHECK-IN (SEND training): a private chat to any student who seemed unsettled last lesson — “Are you okay today? 👍 / 👎”.
@@ -2224,7 +2248,11 @@
           <a:lstStyle/>
           <a:p>
             <a:r>
-              <a:rPr lang="en-US" dirty="0"/>
+              <a:rPr lang="ar-SA" dirty="0">
+                <a:latin typeface="Amiri" pitchFamily="2" charset="-78"/>
+                <a:ea typeface="Amiri" pitchFamily="2" charset="-78"/>
+                <a:cs typeface="Amiri" pitchFamily="2" charset="-78"/>
+              </a:rPr>
               <a:t>TEACH (3 min). Role play = precise and complete; conversation = develop. Choral repetition of the repair phrases. To a girl: تُعِيدِي.</a:t>
             </a:r>
             <a:endParaRPr lang="en-US" dirty="0"/>
@@ -2312,7 +2340,11 @@
           <a:lstStyle/>
           <a:p>
             <a:r>
-              <a:rPr lang="en-US" dirty="0"/>
+              <a:rPr lang="ar-SA" dirty="0">
+                <a:latin typeface="Amiri" pitchFamily="2" charset="-78"/>
+                <a:ea typeface="Amiri" pitchFamily="2" charset="-78"/>
+                <a:cs typeface="Amiri" pitchFamily="2" charset="-78"/>
+              </a:rPr>
               <a:t>LANGUAGE BANK (2 min) — possessive suffixes: ـِي my, ـُنَا our, ـُهُمْ their, ـُكَ / ـُكِ your. Drill: ثَقَافَتِي · ثَقَافَتُنَا · ثَقَافَتُهُمْ. Reminder: the noun loses al- when a suffix is added.</a:t>
             </a:r>
             <a:endParaRPr lang="en-US" dirty="0"/>
@@ -2400,7 +2432,11 @@
           <a:lstStyle/>
           <a:p>
             <a:r>
-              <a:rPr lang="en-US" dirty="0"/>
+              <a:rPr lang="ar-SA" dirty="0">
+                <a:latin typeface="Amiri" pitchFamily="2" charset="-78"/>
+                <a:ea typeface="Amiri" pitchFamily="2" charset="-78"/>
+                <a:cs typeface="Amiri" pitchFamily="2" charset="-78"/>
+              </a:rPr>
               <a:t>LANGUAGE BANK (2 min) — the pattern: إِنَّ + noun (acc.) + claim → لِأَنَّ + reason → مَثَلًا + example. E.g. إِنَّ الطَّعَامَ جُزْءٌ مِنْ هُوِيَّتِي، لِأَنَّهُ يُذَكِّرُنِي بِأَجْدَادِي؛ مَثَلًا …</a:t>
             </a:r>
             <a:endParaRPr lang="en-US" dirty="0"/>
@@ -2576,7 +2612,11 @@
           <a:lstStyle/>
           <a:p>
             <a:r>
-              <a:rPr lang="en-US" dirty="0"/>
+              <a:rPr lang="ar-SA" dirty="0">
+                <a:latin typeface="Amiri" pitchFamily="2" charset="-78"/>
+                <a:ea typeface="Amiri" pitchFamily="2" charset="-78"/>
+                <a:cs typeface="Amiri" pitchFamily="2" charset="-78"/>
+              </a:rPr>
               <a:t>ROLE PLAY A (Core) — a school culture club.
 SET-UP IN THE BREAKOUT ROOM: A = examiner (reads the left column ONLY — the questions, in order), B = candidate (sees the task column; Core may use the help column), C = observer (ticks the feedback checklist). 1 minute preparation, about 3 minutes speaking, 1 minute feedback, then rotate.
 Task ! is the unexpected question: in the exam the candidate has not seen it — the examiner should read it without warning.
@@ -2668,7 +2708,11 @@
           <a:lstStyle/>
           <a:p>
             <a:r>
-              <a:rPr lang="en-US" dirty="0"/>
+              <a:rPr lang="ar-SA" dirty="0">
+                <a:latin typeface="Amiri" pitchFamily="2" charset="-78"/>
+                <a:ea typeface="Amiri" pitchFamily="2" charset="-78"/>
+                <a:cs typeface="Amiri" pitchFamily="2" charset="-78"/>
+              </a:rPr>
               <a:t>ROLE PLAY B (Core+) — International Day at school.
 SET-UP IN THE BREAKOUT ROOM: A = examiner (reads the left column ONLY — the questions, in order), B = candidate (sees the task column; Core may use the help column), C = observer (ticks the feedback checklist). 1 minute preparation, about 3 minutes speaking, 1 minute feedback, then rotate.
 Task ! is the unexpected question: in the exam the candidate has not seen it — the examiner should read it without warning.
@@ -3156,6 +3200,7 @@
                   <a:srgbClr val="D4AF37"/>
                 </a:solidFill>
                 <a:latin typeface="Amiri" pitchFamily="2" charset="-78"/>
+                <a:ea typeface="Amiri" pitchFamily="2" charset="-78"/>
                 <a:cs typeface="Amiri" pitchFamily="2" charset="-78"/>
               </a:rPr>
               <a:t>م</a:t>
@@ -3362,6 +3407,7 @@
                   <a:srgbClr val="D4AF37"/>
                 </a:solidFill>
                 <a:latin typeface="Amiri" pitchFamily="2" charset="-78"/>
+                <a:ea typeface="Amiri" pitchFamily="2" charset="-78"/>
                 <a:cs typeface="Amiri" pitchFamily="2" charset="-78"/>
               </a:rPr>
               <a:t>وَرْشَةُ التَّحَدُّثِ — الثَّقَافَةُ وَالهُوِيَّةُ</a:t>
@@ -3413,6 +3459,7 @@
                   <a:srgbClr val="C6D2E6"/>
                 </a:solidFill>
                 <a:latin typeface="Amiri" pitchFamily="2" charset="-78"/>
+                <a:ea typeface="Amiri" pitchFamily="2" charset="-78"/>
                 <a:cs typeface="Amiri" pitchFamily="2" charset="-78"/>
               </a:rPr>
               <a:t>ثَقَافَتِي</a:t>
@@ -3439,6 +3486,7 @@
                   <a:srgbClr val="C6D2E6"/>
                 </a:solidFill>
                 <a:latin typeface="Amiri" pitchFamily="2" charset="-78"/>
+                <a:ea typeface="Amiri" pitchFamily="2" charset="-78"/>
                 <a:cs typeface="Amiri" pitchFamily="2" charset="-78"/>
               </a:rPr>
               <a:t>عَادَاتُنَا</a:t>
@@ -3465,6 +3513,7 @@
                   <a:srgbClr val="C6D2E6"/>
                 </a:solidFill>
                 <a:latin typeface="Amiri" pitchFamily="2" charset="-78"/>
+                <a:ea typeface="Amiri" pitchFamily="2" charset="-78"/>
                 <a:cs typeface="Amiri" pitchFamily="2" charset="-78"/>
               </a:rPr>
               <a:t>إِنَّ / أَنَّ</a:t>
@@ -3491,6 +3540,7 @@
                   <a:srgbClr val="C6D2E6"/>
                 </a:solidFill>
                 <a:latin typeface="Amiri" pitchFamily="2" charset="-78"/>
+                <a:ea typeface="Amiri" pitchFamily="2" charset="-78"/>
                 <a:cs typeface="Amiri" pitchFamily="2" charset="-78"/>
               </a:rPr>
               <a:t>لِأَنَّ</a:t>
@@ -3517,6 +3567,7 @@
                   <a:srgbClr val="C6D2E6"/>
                 </a:solidFill>
                 <a:latin typeface="Amiri" pitchFamily="2" charset="-78"/>
+                <a:ea typeface="Amiri" pitchFamily="2" charset="-78"/>
                 <a:cs typeface="Amiri" pitchFamily="2" charset="-78"/>
               </a:rPr>
               <a:t>مَثَلًا</a:t>
@@ -3543,6 +3594,7 @@
                   <a:srgbClr val="C6D2E6"/>
                 </a:solidFill>
                 <a:latin typeface="Amiri" pitchFamily="2" charset="-78"/>
+                <a:ea typeface="Amiri" pitchFamily="2" charset="-78"/>
                 <a:cs typeface="Amiri" pitchFamily="2" charset="-78"/>
               </a:rPr>
               <a:t>مِثْلُ</a:t>
@@ -3975,6 +4027,7 @@
                   <a:srgbClr val="D4AF37"/>
                 </a:solidFill>
                 <a:latin typeface="Amiri" pitchFamily="2" charset="-78"/>
+                <a:ea typeface="Amiri" pitchFamily="2" charset="-78"/>
                 <a:cs typeface="Amiri" pitchFamily="2" charset="-78"/>
               </a:rPr>
               <a:t>م</a:t>
@@ -4295,6 +4348,7 @@
                   <a:srgbClr val="8A6D1E"/>
                 </a:solidFill>
                 <a:latin typeface="Amiri" pitchFamily="2" charset="-78"/>
+                <a:ea typeface="Amiri" pitchFamily="2" charset="-78"/>
                 <a:cs typeface="Amiri" pitchFamily="2" charset="-78"/>
               </a:rPr>
               <a:t>مَا الَّذِي يَصْنَعُ هُوِيَّتِي؟</a:t>
@@ -4575,6 +4629,7 @@
                   <a:srgbClr val="1B3B6F"/>
                 </a:solidFill>
                 <a:latin typeface="Amiri" pitchFamily="2" charset="-78"/>
+                <a:ea typeface="Amiri" pitchFamily="2" charset="-78"/>
                 <a:cs typeface="Amiri" pitchFamily="2" charset="-78"/>
               </a:rPr>
               <a:t>هُوِيَّتِي مَزِيجٌ مِنْ: … وَ… وَ…</a:t>
@@ -4651,6 +4706,7 @@
                   <a:srgbClr val="1B3B6F"/>
                 </a:solidFill>
                 <a:latin typeface="Amiri" pitchFamily="2" charset="-78"/>
+                <a:ea typeface="Amiri" pitchFamily="2" charset="-78"/>
                 <a:cs typeface="Amiri" pitchFamily="2" charset="-78"/>
               </a:rPr>
               <a:t>مَا الَّذِي يُكَوِّنُ هُوِيَّتَكَ؟</a:t>
@@ -4754,6 +4810,7 @@
                   <a:srgbClr val="1B3B6F"/>
                 </a:solidFill>
                 <a:latin typeface="Amiri" pitchFamily="2" charset="-78"/>
+                <a:ea typeface="Amiri" pitchFamily="2" charset="-78"/>
                 <a:cs typeface="Amiri" pitchFamily="2" charset="-78"/>
               </a:rPr>
               <a:t>مَثَلًا، كُلَّ … نَجْتَمِعُ … لِأَنَّ …</a:t>
@@ -4830,6 +4887,7 @@
                   <a:srgbClr val="1B3B6F"/>
                 </a:solidFill>
                 <a:latin typeface="Amiri" pitchFamily="2" charset="-78"/>
+                <a:ea typeface="Amiri" pitchFamily="2" charset="-78"/>
                 <a:cs typeface="Amiri" pitchFamily="2" charset="-78"/>
               </a:rPr>
               <a:t>أَعْطِنَا مِثَالًا عَلَى تَقْلِيدٍ فِي أُسْرَتِكَ.</a:t>
@@ -4933,6 +4991,7 @@
                   <a:srgbClr val="1B3B6F"/>
                 </a:solidFill>
                 <a:latin typeface="Amiri" pitchFamily="2" charset="-78"/>
+                <a:ea typeface="Amiri" pitchFamily="2" charset="-78"/>
                 <a:cs typeface="Amiri" pitchFamily="2" charset="-78"/>
               </a:rPr>
               <a:t>عِنْدَمَا كُنْتُ صَغِيرًا كُنْتُ … أَمَّا الآنَ فَأُشَارِكُ …</a:t>
@@ -5009,6 +5068,7 @@
                   <a:srgbClr val="1B3B6F"/>
                 </a:solidFill>
                 <a:latin typeface="Amiri" pitchFamily="2" charset="-78"/>
+                <a:ea typeface="Amiri" pitchFamily="2" charset="-78"/>
                 <a:cs typeface="Amiri" pitchFamily="2" charset="-78"/>
               </a:rPr>
               <a:t>هَلْ تَغَيَّرَتْ نَظْرَتُكَ إِلَى ثَقَافَتِكَ؟</a:t>
@@ -5112,6 +5172,7 @@
                   <a:srgbClr val="1B3B6F"/>
                 </a:solidFill>
                 <a:latin typeface="Amiri" pitchFamily="2" charset="-78"/>
+                <a:ea typeface="Amiri" pitchFamily="2" charset="-78"/>
                 <a:cs typeface="Amiri" pitchFamily="2" charset="-78"/>
               </a:rPr>
               <a:t>إِنَّ … ؛ مَثَلًا …</a:t>
@@ -5188,6 +5249,7 @@
                   <a:srgbClr val="1B3B6F"/>
                 </a:solidFill>
                 <a:latin typeface="Amiri" pitchFamily="2" charset="-78"/>
+                <a:ea typeface="Amiri" pitchFamily="2" charset="-78"/>
                 <a:cs typeface="Amiri" pitchFamily="2" charset="-78"/>
               </a:rPr>
               <a:t>مَا الشَّيْءُ الَّذِي تُرِيدُ أَنْ يَفْهَمَهُ النَّاسُ عَنْ ثَقَافَتِكَ؟</a:t>
@@ -5291,6 +5353,7 @@
                   <a:srgbClr val="1B3B6F"/>
                 </a:solidFill>
                 <a:latin typeface="Amiri" pitchFamily="2" charset="-78"/>
+                <a:ea typeface="Amiri" pitchFamily="2" charset="-78"/>
                 <a:cs typeface="Amiri" pitchFamily="2" charset="-78"/>
               </a:rPr>
               <a:t>أَشْعُرُ بِأَنَّنِي … وَ… مَعًا، لِأَنَّ …</a:t>
@@ -5367,6 +5430,7 @@
                   <a:srgbClr val="1B3B6F"/>
                 </a:solidFill>
                 <a:latin typeface="Amiri" pitchFamily="2" charset="-78"/>
+                <a:ea typeface="Amiri" pitchFamily="2" charset="-78"/>
                 <a:cs typeface="Amiri" pitchFamily="2" charset="-78"/>
               </a:rPr>
               <a:t>هَلْ تَشْعُرُ بِأَنَّكَ بَرِيطَانِيٌّ أَمْ عَرَبِيٌّ؟</a:t>
@@ -5576,6 +5640,7 @@
                   <a:srgbClr val="D4AF37"/>
                 </a:solidFill>
                 <a:latin typeface="Amiri" pitchFamily="2" charset="-78"/>
+                <a:ea typeface="Amiri" pitchFamily="2" charset="-78"/>
                 <a:cs typeface="Amiri" pitchFamily="2" charset="-78"/>
               </a:rPr>
               <a:t>م</a:t>
@@ -5896,6 +5961,7 @@
                   <a:srgbClr val="8A6D1E"/>
                 </a:solidFill>
                 <a:latin typeface="Amiri" pitchFamily="2" charset="-78"/>
+                <a:ea typeface="Amiri" pitchFamily="2" charset="-78"/>
                 <a:cs typeface="Amiri" pitchFamily="2" charset="-78"/>
               </a:rPr>
               <a:t>العَوْلَمَةُ وَالهُوِيَّةُ</a:t>
@@ -6176,6 +6242,7 @@
                   <a:srgbClr val="1B3B6F"/>
                 </a:solidFill>
                 <a:latin typeface="Amiri" pitchFamily="2" charset="-78"/>
+                <a:ea typeface="Amiri" pitchFamily="2" charset="-78"/>
                 <a:cs typeface="Amiri" pitchFamily="2" charset="-78"/>
               </a:rPr>
               <a:t>لَا شَكَّ أَنَّ … غَيْرَ أَنَّنِي أَرَى أَنَّ …</a:t>
@@ -6252,6 +6319,7 @@
                   <a:srgbClr val="1B3B6F"/>
                 </a:solidFill>
                 <a:latin typeface="Amiri" pitchFamily="2" charset="-78"/>
+                <a:ea typeface="Amiri" pitchFamily="2" charset="-78"/>
                 <a:cs typeface="Amiri" pitchFamily="2" charset="-78"/>
               </a:rPr>
               <a:t>هَلْ تُهَدِّدُ العَوْلَمَةُ هُوِيَّاتِ الشُّعُوبِ؟</a:t>
@@ -6355,6 +6423,7 @@
                   <a:srgbClr val="1B3B6F"/>
                 </a:solidFill>
                 <a:latin typeface="Amiri" pitchFamily="2" charset="-78"/>
+                <a:ea typeface="Amiri" pitchFamily="2" charset="-78"/>
                 <a:cs typeface="Amiri" pitchFamily="2" charset="-78"/>
               </a:rPr>
               <a:t>مَثَلًا، … بِسَبَبِ … مِمَّا …</a:t>
@@ -6431,6 +6500,7 @@
                   <a:srgbClr val="1B3B6F"/>
                 </a:solidFill>
                 <a:latin typeface="Amiri" pitchFamily="2" charset="-78"/>
+                <a:ea typeface="Amiri" pitchFamily="2" charset="-78"/>
                 <a:cs typeface="Amiri" pitchFamily="2" charset="-78"/>
               </a:rPr>
               <a:t>أَعْطِنَا دَلِيلًا.</a:t>
@@ -6534,6 +6604,7 @@
                   <a:srgbClr val="1B3B6F"/>
                 </a:solidFill>
                 <a:latin typeface="Amiri" pitchFamily="2" charset="-78"/>
+                <a:ea typeface="Amiri" pitchFamily="2" charset="-78"/>
                 <a:cs typeface="Amiri" pitchFamily="2" charset="-78"/>
               </a:rPr>
               <a:t>صَحِيحٌ أَنَّ … وَمَعَ ذٰلِكَ فَإِنَّ …</a:t>
@@ -6610,6 +6681,7 @@
                   <a:srgbClr val="1B3B6F"/>
                 </a:solidFill>
                 <a:latin typeface="Amiri" pitchFamily="2" charset="-78"/>
+                <a:ea typeface="Amiri" pitchFamily="2" charset="-78"/>
                 <a:cs typeface="Amiri" pitchFamily="2" charset="-78"/>
               </a:rPr>
               <a:t>لٰكِنَّ الإِنْتَرْنِتَ يُسَاعِدُ عَلَى نَشْرِ الثَّقَافَاتِ أَيْضًا.</a:t>
@@ -6713,6 +6785,7 @@
                   <a:srgbClr val="1B3B6F"/>
                 </a:solidFill>
                 <a:latin typeface="Amiri" pitchFamily="2" charset="-78"/>
+                <a:ea typeface="Amiri" pitchFamily="2" charset="-78"/>
                 <a:cs typeface="Amiri" pitchFamily="2" charset="-78"/>
               </a:rPr>
               <a:t>أُحَافِظُ عَلَيْهَا بِالقِرَاءَةِ … ؛ فَقَدْ …</a:t>
@@ -6789,6 +6862,7 @@
                   <a:srgbClr val="1B3B6F"/>
                 </a:solidFill>
                 <a:latin typeface="Amiri" pitchFamily="2" charset="-78"/>
+                <a:ea typeface="Amiri" pitchFamily="2" charset="-78"/>
                 <a:cs typeface="Amiri" pitchFamily="2" charset="-78"/>
               </a:rPr>
               <a:t>كَيْفَ تُحَافِظُ أَنْتَ عَلَى هُوِيَّتِكَ؟</a:t>
@@ -6892,6 +6966,7 @@
                   <a:srgbClr val="1B3B6F"/>
                 </a:solidFill>
                 <a:latin typeface="Amiri" pitchFamily="2" charset="-78"/>
+                <a:ea typeface="Amiri" pitchFamily="2" charset="-78"/>
                 <a:cs typeface="Amiri" pitchFamily="2" charset="-78"/>
               </a:rPr>
               <a:t>لَوْ كَانَ لِي ذٰلِكَ، لَاخْتَرْتُ … لِأَنَّ …</a:t>
@@ -6971,6 +7046,7 @@
                   <a:srgbClr val="1B3B6F"/>
                 </a:solidFill>
                 <a:latin typeface="Amiri" pitchFamily="2" charset="-78"/>
+                <a:ea typeface="Amiri" pitchFamily="2" charset="-78"/>
                 <a:cs typeface="Amiri" pitchFamily="2" charset="-78"/>
               </a:rPr>
               <a:t>لَوْ كَانَ لَكَ أَنْ تَحْفَظَ شَيْئًا وَاحِدًا مِنْ ثَقَافَتِكَ لِلْمُسْتَقْبَلِ، فَمَا هُوَ؟</a:t>
@@ -7180,6 +7256,7 @@
                   <a:srgbClr val="D4AF37"/>
                 </a:solidFill>
                 <a:latin typeface="Amiri" pitchFamily="2" charset="-78"/>
+                <a:ea typeface="Amiri" pitchFamily="2" charset="-78"/>
                 <a:cs typeface="Amiri" pitchFamily="2" charset="-78"/>
               </a:rPr>
               <a:t>م</a:t>
@@ -7500,6 +7577,7 @@
                   <a:srgbClr val="8A6D1E"/>
                 </a:solidFill>
                 <a:latin typeface="Amiri" pitchFamily="2" charset="-78"/>
+                <a:ea typeface="Amiri" pitchFamily="2" charset="-78"/>
                 <a:cs typeface="Amiri" pitchFamily="2" charset="-78"/>
               </a:rPr>
               <a:t>وَرَقَةُ المُلَاحِظِ</a:t>
@@ -8970,6 +9048,7 @@
                   <a:srgbClr val="D4AF37"/>
                 </a:solidFill>
                 <a:latin typeface="Amiri" pitchFamily="2" charset="-78"/>
+                <a:ea typeface="Amiri" pitchFamily="2" charset="-78"/>
                 <a:cs typeface="Amiri" pitchFamily="2" charset="-78"/>
               </a:rPr>
               <a:t>م</a:t>
@@ -9290,6 +9369,7 @@
                   <a:srgbClr val="8A6D1E"/>
                 </a:solidFill>
                 <a:latin typeface="Amiri" pitchFamily="2" charset="-78"/>
+                <a:ea typeface="Amiri" pitchFamily="2" charset="-78"/>
                 <a:cs typeface="Amiri" pitchFamily="2" charset="-78"/>
               </a:rPr>
               <a:t>نَمُوذَجُ الإِجَابَةِ</a:t>
@@ -9532,6 +9612,7 @@
                   <a:srgbClr val="1B3B6F"/>
                 </a:solidFill>
                 <a:latin typeface="Amiri" pitchFamily="2" charset="-78"/>
+                <a:ea typeface="Amiri" pitchFamily="2" charset="-78"/>
                 <a:cs typeface="Amiri" pitchFamily="2" charset="-78"/>
               </a:rPr>
               <a:t>ثَقَافَتِي فِلَسْطِينِيَّةٌ وَبَرِيطَانِيَّةٌ، لِأَنَّ أُسْرَتِي مِنْ فِلَسْطِينَ.</a:t>
@@ -9608,6 +9689,7 @@
                   <a:srgbClr val="1B3B6F"/>
                 </a:solidFill>
                 <a:latin typeface="Amiri" pitchFamily="2" charset="-78"/>
+                <a:ea typeface="Amiri" pitchFamily="2" charset="-78"/>
                 <a:cs typeface="Amiri" pitchFamily="2" charset="-78"/>
               </a:rPr>
               <a:t>أَهْلًا! مَا ثَقَافَتُكَ؟</a:t>
@@ -9711,6 +9793,7 @@
                   <a:srgbClr val="1B3B6F"/>
                 </a:solidFill>
                 <a:latin typeface="Amiri" pitchFamily="2" charset="-78"/>
+                <a:ea typeface="Amiri" pitchFamily="2" charset="-78"/>
                 <a:cs typeface="Amiri" pitchFamily="2" charset="-78"/>
               </a:rPr>
               <a:t>أَكْلَتُنَا الشَّعْبِيَّةُ المَقْلُوبَةُ، وَهِيَ لَذِيذَةٌ جِدًّا.</a:t>
@@ -9787,6 +9870,7 @@
                   <a:srgbClr val="1B3B6F"/>
                 </a:solidFill>
                 <a:latin typeface="Amiri" pitchFamily="2" charset="-78"/>
+                <a:ea typeface="Amiri" pitchFamily="2" charset="-78"/>
                 <a:cs typeface="Amiri" pitchFamily="2" charset="-78"/>
               </a:rPr>
               <a:t>مَا أَكْلَتُكُمُ الشَّعْبِيَّةُ؟</a:t>
@@ -9890,6 +9974,7 @@
                   <a:srgbClr val="1B3B6F"/>
                 </a:solidFill>
                 <a:latin typeface="Amiri" pitchFamily="2" charset="-78"/>
+                <a:ea typeface="Amiri" pitchFamily="2" charset="-78"/>
                 <a:cs typeface="Amiri" pitchFamily="2" charset="-78"/>
               </a:rPr>
               <a:t>نَعَمْ، مِثْلُ الثَّوْبِ المُطَرَّزِ الَّذِي تَلْبَسُهُ جَدَّتِي.</a:t>
@@ -9966,6 +10051,7 @@
                   <a:srgbClr val="1B3B6F"/>
                 </a:solidFill>
                 <a:latin typeface="Amiri" pitchFamily="2" charset="-78"/>
+                <a:ea typeface="Amiri" pitchFamily="2" charset="-78"/>
                 <a:cs typeface="Amiri" pitchFamily="2" charset="-78"/>
               </a:rPr>
               <a:t>وَهَلْ عِنْدَكُمْ زِيٌّ تَقْلِيدِيٌّ؟</a:t>
@@ -10069,6 +10155,7 @@
                   <a:srgbClr val="1B3B6F"/>
                 </a:solidFill>
                 <a:latin typeface="Amiri" pitchFamily="2" charset="-78"/>
+                <a:ea typeface="Amiri" pitchFamily="2" charset="-78"/>
                 <a:cs typeface="Amiri" pitchFamily="2" charset="-78"/>
               </a:rPr>
               <a:t>فِي أَيِّ يَوْمٍ نَلْتَقِي؟</a:t>
@@ -10145,6 +10232,7 @@
                   <a:srgbClr val="1B3B6F"/>
                 </a:solidFill>
                 <a:latin typeface="Amiri" pitchFamily="2" charset="-78"/>
+                <a:ea typeface="Amiri" pitchFamily="2" charset="-78"/>
                 <a:cs typeface="Amiri" pitchFamily="2" charset="-78"/>
               </a:rPr>
               <a:t>نَلْتَقِي كُلَّ أُسْبُوعٍ.</a:t>
@@ -10248,6 +10336,7 @@
                   <a:srgbClr val="1B3B6F"/>
                 </a:solidFill>
                 <a:latin typeface="Amiri" pitchFamily="2" charset="-78"/>
+                <a:ea typeface="Amiri" pitchFamily="2" charset="-78"/>
                 <a:cs typeface="Amiri" pitchFamily="2" charset="-78"/>
               </a:rPr>
               <a:t>أَهَمُّ شَيْءٍ الأُسْرَةُ، لِأَنَّنَا نَجْتَمِعُ كُلَّ جُمُعَةٍ.</a:t>
@@ -10324,6 +10413,7 @@
                   <a:srgbClr val="1B3B6F"/>
                 </a:solidFill>
                 <a:latin typeface="Amiri" pitchFamily="2" charset="-78"/>
+                <a:ea typeface="Amiri" pitchFamily="2" charset="-78"/>
                 <a:cs typeface="Amiri" pitchFamily="2" charset="-78"/>
               </a:rPr>
               <a:t>يَوْمَ الخَمِيسِ. مَا أَهَمُّ شَيْءٍ فِي ثَقَافَتِكَ؟</a:t>
@@ -10533,6 +10623,7 @@
                   <a:srgbClr val="D4AF37"/>
                 </a:solidFill>
                 <a:latin typeface="Amiri" pitchFamily="2" charset="-78"/>
+                <a:ea typeface="Amiri" pitchFamily="2" charset="-78"/>
                 <a:cs typeface="Amiri" pitchFamily="2" charset="-78"/>
               </a:rPr>
               <a:t>م</a:t>
@@ -10853,6 +10944,7 @@
                   <a:srgbClr val="8A6D1E"/>
                 </a:solidFill>
                 <a:latin typeface="Amiri" pitchFamily="2" charset="-78"/>
+                <a:ea typeface="Amiri" pitchFamily="2" charset="-78"/>
                 <a:cs typeface="Amiri" pitchFamily="2" charset="-78"/>
               </a:rPr>
               <a:t>نَمُوذَجُ الإِجَابَةِ</a:t>
@@ -11095,6 +11187,7 @@
                   <a:srgbClr val="1B3B6F"/>
                 </a:solidFill>
                 <a:latin typeface="Amiri" pitchFamily="2" charset="-78"/>
+                <a:ea typeface="Amiri" pitchFamily="2" charset="-78"/>
                 <a:cs typeface="Amiri" pitchFamily="2" charset="-78"/>
               </a:rPr>
               <a:t>سَأُحْضِرُ كَعْكًا بِالتَّمْرِ وَصُوَرًا لِقَرْيَةِ أَجْدَادِي.</a:t>
@@ -11171,6 +11264,7 @@
                   <a:srgbClr val="1B3B6F"/>
                 </a:solidFill>
                 <a:latin typeface="Amiri" pitchFamily="2" charset="-78"/>
+                <a:ea typeface="Amiri" pitchFamily="2" charset="-78"/>
                 <a:cs typeface="Amiri" pitchFamily="2" charset="-78"/>
               </a:rPr>
               <a:t>مَاذَا سَتُحْضِرُ إِلَى اليَوْمِ الدُّوَلِيِّ؟</a:t>
@@ -11274,6 +11368,7 @@
                   <a:srgbClr val="1B3B6F"/>
                 </a:solidFill>
                 <a:latin typeface="Amiri" pitchFamily="2" charset="-78"/>
+                <a:ea typeface="Amiri" pitchFamily="2" charset="-78"/>
                 <a:cs typeface="Amiri" pitchFamily="2" charset="-78"/>
               </a:rPr>
               <a:t>سَأَلْبَسُ الكُوفِيَّةَ، وَلَوْنُهَا أَبْيَضُ وَأَسْوَدُ.</a:t>
@@ -11350,6 +11445,7 @@
                   <a:srgbClr val="1B3B6F"/>
                 </a:solidFill>
                 <a:latin typeface="Amiri" pitchFamily="2" charset="-78"/>
+                <a:ea typeface="Amiri" pitchFamily="2" charset="-78"/>
                 <a:cs typeface="Amiri" pitchFamily="2" charset="-78"/>
               </a:rPr>
               <a:t>وَمَاذَا سَتَلْبَسُ؟</a:t>
@@ -11453,6 +11549,7 @@
                   <a:srgbClr val="1B3B6F"/>
                 </a:solidFill>
                 <a:latin typeface="Amiri" pitchFamily="2" charset="-78"/>
+                <a:ea typeface="Amiri" pitchFamily="2" charset="-78"/>
                 <a:cs typeface="Amiri" pitchFamily="2" charset="-78"/>
               </a:rPr>
               <a:t>لِأَنَّهَا تُمَثِّلُ تُرَاثَنَا؛ إِنَّ الكُوفِيَّةَ جُزْءٌ مِنْ هُوِيَّتِنَا.</a:t>
@@ -11529,6 +11626,7 @@
                   <a:srgbClr val="1B3B6F"/>
                 </a:solidFill>
                 <a:latin typeface="Amiri" pitchFamily="2" charset="-78"/>
+                <a:ea typeface="Amiri" pitchFamily="2" charset="-78"/>
                 <a:cs typeface="Amiri" pitchFamily="2" charset="-78"/>
               </a:rPr>
               <a:t>لِمَاذَا اخْتَرْتَ هٰذِهِ الأَشْيَاءَ؟</a:t>
@@ -11632,6 +11730,7 @@
                   <a:srgbClr val="1B3B6F"/>
                 </a:solidFill>
                 <a:latin typeface="Amiri" pitchFamily="2" charset="-78"/>
+                <a:ea typeface="Amiri" pitchFamily="2" charset="-78"/>
                 <a:cs typeface="Amiri" pitchFamily="2" charset="-78"/>
               </a:rPr>
               <a:t>رَائِعٌ! هَلْ سَيَكُونُ هُنَاكَ عَرْضُ أَزْيَاءٍ؟ وَمَتَى يَبْدَأُ الحَفْلُ؟</a:t>
@@ -11708,6 +11807,7 @@
                   <a:srgbClr val="1B3B6F"/>
                 </a:solidFill>
                 <a:latin typeface="Amiri" pitchFamily="2" charset="-78"/>
+                <a:ea typeface="Amiri" pitchFamily="2" charset="-78"/>
                 <a:cs typeface="Amiri" pitchFamily="2" charset="-78"/>
               </a:rPr>
               <a:t>سَيَكُونُ هُنَاكَ طُلَّابٌ مِنْ ثَلَاثِينَ بَلَدًا.</a:t>
@@ -11811,6 +11911,7 @@
                   <a:srgbClr val="1B3B6F"/>
                 </a:solidFill>
                 <a:latin typeface="Amiri" pitchFamily="2" charset="-78"/>
+                <a:ea typeface="Amiri" pitchFamily="2" charset="-78"/>
                 <a:cs typeface="Amiri" pitchFamily="2" charset="-78"/>
               </a:rPr>
               <a:t>نَعَمْ، أَعْتَزُّ بِهَا كَثِيرًا، لِأَنَّهَا تُعَلِّمُنَا الكَرَمَ؛ مَثَلًا، نُقَدِّمُ القَهْوَةَ لِكُلِّ ضَيْفٍ.</a:t>
@@ -11887,6 +11988,7 @@
                   <a:srgbClr val="1B3B6F"/>
                 </a:solidFill>
                 <a:latin typeface="Amiri" pitchFamily="2" charset="-78"/>
+                <a:ea typeface="Amiri" pitchFamily="2" charset="-78"/>
                 <a:cs typeface="Amiri" pitchFamily="2" charset="-78"/>
               </a:rPr>
               <a:t>نَعَمْ، فِي الثَّانِيَةِ. هَلْ أَنْتَ فَخُورٌ بِثَقَافَتِكَ؟</a:t>
@@ -12096,6 +12198,7 @@
                   <a:srgbClr val="D4AF37"/>
                 </a:solidFill>
                 <a:latin typeface="Amiri" pitchFamily="2" charset="-78"/>
+                <a:ea typeface="Amiri" pitchFamily="2" charset="-78"/>
                 <a:cs typeface="Amiri" pitchFamily="2" charset="-78"/>
               </a:rPr>
               <a:t>م</a:t>
@@ -12416,6 +12519,7 @@
                   <a:srgbClr val="8A6D1E"/>
                 </a:solidFill>
                 <a:latin typeface="Amiri" pitchFamily="2" charset="-78"/>
+                <a:ea typeface="Amiri" pitchFamily="2" charset="-78"/>
                 <a:cs typeface="Amiri" pitchFamily="2" charset="-78"/>
               </a:rPr>
               <a:t>نَمُوذَجُ الإِجَابَةِ</a:t>
@@ -12658,6 +12762,7 @@
                   <a:srgbClr val="1B3B6F"/>
                 </a:solidFill>
                 <a:latin typeface="Amiri" pitchFamily="2" charset="-78"/>
+                <a:ea typeface="Amiri" pitchFamily="2" charset="-78"/>
                 <a:cs typeface="Amiri" pitchFamily="2" charset="-78"/>
               </a:rPr>
               <a:t>هُوِيَّتِي مَزِيجٌ مِنْ ثَلَاثَةِ أَشْيَاءَ: دِينِي، وَلُغَةِ أَجْدَادِي، وَالمَدِينَةِ الَّتِي نَشَأْتُ فِيهَا.</a:t>
@@ -12734,6 +12839,7 @@
                   <a:srgbClr val="1B3B6F"/>
                 </a:solidFill>
                 <a:latin typeface="Amiri" pitchFamily="2" charset="-78"/>
+                <a:ea typeface="Amiri" pitchFamily="2" charset="-78"/>
                 <a:cs typeface="Amiri" pitchFamily="2" charset="-78"/>
               </a:rPr>
               <a:t>مَا الَّذِي يُكَوِّنُ هُوِيَّتَكَ؟</a:t>
@@ -12837,6 +12943,7 @@
                   <a:srgbClr val="1B3B6F"/>
                 </a:solidFill>
                 <a:latin typeface="Amiri" pitchFamily="2" charset="-78"/>
+                <a:ea typeface="Amiri" pitchFamily="2" charset="-78"/>
                 <a:cs typeface="Amiri" pitchFamily="2" charset="-78"/>
               </a:rPr>
               <a:t>مَثَلًا، كُلَّ لَيْلَةِ جُمُعَةٍ نَجْتَمِعُ عِنْدَ جَدِّي، فَيَحْكِي لَنَا قِصَصًا عَنْ قَرْيَتِهِ، لِأَنَّهُ يُرِيدُ أَنْ نَعْرِفَ جُذُورَنَا.</a:t>
@@ -12913,6 +13020,7 @@
                   <a:srgbClr val="1B3B6F"/>
                 </a:solidFill>
                 <a:latin typeface="Amiri" pitchFamily="2" charset="-78"/>
+                <a:ea typeface="Amiri" pitchFamily="2" charset="-78"/>
                 <a:cs typeface="Amiri" pitchFamily="2" charset="-78"/>
               </a:rPr>
               <a:t>أَعْطِنَا مِثَالًا عَلَى تَقْلِيدٍ فِي أُسْرَتِكَ.</a:t>
@@ -13016,6 +13124,7 @@
                   <a:srgbClr val="1B3B6F"/>
                 </a:solidFill>
                 <a:latin typeface="Amiri" pitchFamily="2" charset="-78"/>
+                <a:ea typeface="Amiri" pitchFamily="2" charset="-78"/>
                 <a:cs typeface="Amiri" pitchFamily="2" charset="-78"/>
               </a:rPr>
               <a:t>عِنْدَمَا كُنْتُ صَغِيرًا كُنْتُ أَخْجَلُ مِنْ طَعَامِنَا فِي المَدْرَسَةِ، أَمَّا الآنَ فَأُشَارِكُهُ مَعَ أَصْدِقَائِي بِفَخْرٍ.</a:t>
@@ -13092,6 +13201,7 @@
                   <a:srgbClr val="1B3B6F"/>
                 </a:solidFill>
                 <a:latin typeface="Amiri" pitchFamily="2" charset="-78"/>
+                <a:ea typeface="Amiri" pitchFamily="2" charset="-78"/>
                 <a:cs typeface="Amiri" pitchFamily="2" charset="-78"/>
               </a:rPr>
               <a:t>هَلْ تَغَيَّرَتْ نَظْرَتُكَ إِلَى ثَقَافَتِكَ؟</a:t>
@@ -13195,6 +13305,7 @@
                   <a:srgbClr val="1B3B6F"/>
                 </a:solidFill>
                 <a:latin typeface="Amiri" pitchFamily="2" charset="-78"/>
+                <a:ea typeface="Amiri" pitchFamily="2" charset="-78"/>
                 <a:cs typeface="Amiri" pitchFamily="2" charset="-78"/>
               </a:rPr>
               <a:t>إِنَّ ثَقَافَتَنَا تَقُومُ عَلَى احْتِرَامِ الكِبَارِ؛ مَثَلًا، لَا نَجْلِسُ قَبْلَ أَنْ يَجْلِسَ جَدُّنَا.</a:t>
@@ -13271,6 +13382,7 @@
                   <a:srgbClr val="1B3B6F"/>
                 </a:solidFill>
                 <a:latin typeface="Amiri" pitchFamily="2" charset="-78"/>
+                <a:ea typeface="Amiri" pitchFamily="2" charset="-78"/>
                 <a:cs typeface="Amiri" pitchFamily="2" charset="-78"/>
               </a:rPr>
               <a:t>مَا الشَّيْءُ الَّذِي تُرِيدُ أَنْ يَفْهَمَهُ النَّاسُ عَنْ ثَقَافَتِكَ؟</a:t>
@@ -13374,6 +13486,7 @@
                   <a:srgbClr val="1B3B6F"/>
                 </a:solidFill>
                 <a:latin typeface="Amiri" pitchFamily="2" charset="-78"/>
+                <a:ea typeface="Amiri" pitchFamily="2" charset="-78"/>
                 <a:cs typeface="Amiri" pitchFamily="2" charset="-78"/>
               </a:rPr>
               <a:t>أَشْعُرُ بِأَنَّنِي الاثْنَانِ مَعًا، لِأَنَّ الهُوِيَّةَ لَيْسَتْ صُنْدُوقًا وَاحِدًا، بَلْ بَيْتٌ فِيهِ غُرَفٌ كَثِيرَةٌ.</a:t>
@@ -13450,6 +13563,7 @@
                   <a:srgbClr val="1B3B6F"/>
                 </a:solidFill>
                 <a:latin typeface="Amiri" pitchFamily="2" charset="-78"/>
+                <a:ea typeface="Amiri" pitchFamily="2" charset="-78"/>
                 <a:cs typeface="Amiri" pitchFamily="2" charset="-78"/>
               </a:rPr>
               <a:t>هَلْ تَشْعُرُ بِأَنَّكَ بَرِيطَانِيٌّ أَمْ عَرَبِيٌّ؟</a:t>
@@ -13659,6 +13773,7 @@
                   <a:srgbClr val="D4AF37"/>
                 </a:solidFill>
                 <a:latin typeface="Amiri" pitchFamily="2" charset="-78"/>
+                <a:ea typeface="Amiri" pitchFamily="2" charset="-78"/>
                 <a:cs typeface="Amiri" pitchFamily="2" charset="-78"/>
               </a:rPr>
               <a:t>م</a:t>
@@ -13979,6 +14094,7 @@
                   <a:srgbClr val="8A6D1E"/>
                 </a:solidFill>
                 <a:latin typeface="Amiri" pitchFamily="2" charset="-78"/>
+                <a:ea typeface="Amiri" pitchFamily="2" charset="-78"/>
                 <a:cs typeface="Amiri" pitchFamily="2" charset="-78"/>
               </a:rPr>
               <a:t>نَمُوذَجُ الإِجَابَةِ</a:t>
@@ -14221,6 +14337,7 @@
                   <a:srgbClr val="1B3B6F"/>
                 </a:solidFill>
                 <a:latin typeface="Amiri" pitchFamily="2" charset="-78"/>
+                <a:ea typeface="Amiri" pitchFamily="2" charset="-78"/>
                 <a:cs typeface="Amiri" pitchFamily="2" charset="-78"/>
               </a:rPr>
               <a:t>لَا شَكَّ أَنَّ العَوْلَمَةَ قَرَّبَتِ الثَّقَافَاتِ، غَيْرَ أَنَّنِي أَرَى أَنَّهَا تُهَدِّدُ اللُّغَاتِ وَالعَادَاتِ الصَّغِيرَةَ إِذَا لَمْ نَحْمِهَا.</a:t>
@@ -14297,6 +14414,7 @@
                   <a:srgbClr val="1B3B6F"/>
                 </a:solidFill>
                 <a:latin typeface="Amiri" pitchFamily="2" charset="-78"/>
+                <a:ea typeface="Amiri" pitchFamily="2" charset="-78"/>
                 <a:cs typeface="Amiri" pitchFamily="2" charset="-78"/>
               </a:rPr>
               <a:t>هَلْ تُهَدِّدُ العَوْلَمَةُ هُوِيَّاتِ الشُّعُوبِ؟</a:t>
@@ -14400,6 +14518,7 @@
                   <a:srgbClr val="1B3B6F"/>
                 </a:solidFill>
                 <a:latin typeface="Amiri" pitchFamily="2" charset="-78"/>
+                <a:ea typeface="Amiri" pitchFamily="2" charset="-78"/>
                 <a:cs typeface="Amiri" pitchFamily="2" charset="-78"/>
               </a:rPr>
               <a:t>مَثَلًا، أَصْبَحَ الشَّبَابُ فِي كُلِّ مَكَانٍ يَأْكُلُونَ الطَّعَامَ نَفْسَهُ وَيَلْبَسُونَ المَلَابِسَ نَفْسَهَا بِسَبَبِ الإِعْلَانَاتِ، مِمَّا يُنْسِيهِمْ أَكَلَاتِ أَجْدَادِهِمْ.</a:t>
@@ -14476,6 +14595,7 @@
                   <a:srgbClr val="1B3B6F"/>
                 </a:solidFill>
                 <a:latin typeface="Amiri" pitchFamily="2" charset="-78"/>
+                <a:ea typeface="Amiri" pitchFamily="2" charset="-78"/>
                 <a:cs typeface="Amiri" pitchFamily="2" charset="-78"/>
               </a:rPr>
               <a:t>أَعْطِنَا دَلِيلًا.</a:t>
@@ -14579,6 +14699,7 @@
                   <a:srgbClr val="1B3B6F"/>
                 </a:solidFill>
                 <a:latin typeface="Amiri" pitchFamily="2" charset="-78"/>
+                <a:ea typeface="Amiri" pitchFamily="2" charset="-78"/>
                 <a:cs typeface="Amiri" pitchFamily="2" charset="-78"/>
               </a:rPr>
               <a:t>صَحِيحٌ أَنَّ الإِنْتَرْنِتَ نَشَرَ مَوْسِيقَانَا وَمَطْبَخَنَا، وَمَعَ ذٰلِكَ فَإِنَّ مَا يَنْتَشِرُ هُوَ الشَّكْلُ لَا المَعْنَى العَمِيقُ.</a:t>
@@ -14655,6 +14776,7 @@
                   <a:srgbClr val="1B3B6F"/>
                 </a:solidFill>
                 <a:latin typeface="Amiri" pitchFamily="2" charset="-78"/>
+                <a:ea typeface="Amiri" pitchFamily="2" charset="-78"/>
                 <a:cs typeface="Amiri" pitchFamily="2" charset="-78"/>
               </a:rPr>
               <a:t>لٰكِنَّ الإِنْتَرْنِتَ يُسَاعِدُ عَلَى نَشْرِ الثَّقَافَاتِ أَيْضًا.</a:t>
@@ -14758,6 +14880,7 @@
                   <a:srgbClr val="1B3B6F"/>
                 </a:solidFill>
                 <a:latin typeface="Amiri" pitchFamily="2" charset="-78"/>
+                <a:ea typeface="Amiri" pitchFamily="2" charset="-78"/>
                 <a:cs typeface="Amiri" pitchFamily="2" charset="-78"/>
               </a:rPr>
               <a:t>أُحَافِظُ عَلَيْهَا بِالقِرَاءَةِ بِلُغَتِي، وَبِتَعَلُّمِ الطَّبْخِ مِنْ جَدَّتِي؛ فَقَدْ سَجَّلْتُ وَصَفَاتِهَا كُلَّهَا فِي دَفْتَرٍ خَاصٍّ.</a:t>
@@ -14834,6 +14957,7 @@
                   <a:srgbClr val="1B3B6F"/>
                 </a:solidFill>
                 <a:latin typeface="Amiri" pitchFamily="2" charset="-78"/>
+                <a:ea typeface="Amiri" pitchFamily="2" charset="-78"/>
                 <a:cs typeface="Amiri" pitchFamily="2" charset="-78"/>
               </a:rPr>
               <a:t>كَيْفَ تُحَافِظُ أَنْتَ عَلَى هُوِيَّتِكَ؟</a:t>
@@ -14937,6 +15061,7 @@
                   <a:srgbClr val="1B3B6F"/>
                 </a:solidFill>
                 <a:latin typeface="Amiri" pitchFamily="2" charset="-78"/>
+                <a:ea typeface="Amiri" pitchFamily="2" charset="-78"/>
                 <a:cs typeface="Amiri" pitchFamily="2" charset="-78"/>
               </a:rPr>
               <a:t>لَوْ كَانَ لِي ذٰلِكَ، لَاخْتَرْتُ لُغَتَنَا، لِأَنَّ اللُّغَةَ هِيَ الوِعَاءُ الَّذِي يَحْمِلُ القِصَصَ وَالقِيَمَ وَالأَمْثَالَ مَعًا.</a:t>
@@ -15016,6 +15141,7 @@
                   <a:srgbClr val="1B3B6F"/>
                 </a:solidFill>
                 <a:latin typeface="Amiri" pitchFamily="2" charset="-78"/>
+                <a:ea typeface="Amiri" pitchFamily="2" charset="-78"/>
                 <a:cs typeface="Amiri" pitchFamily="2" charset="-78"/>
               </a:rPr>
               <a:t>لَوْ كَانَ لَكَ أَنْ تَحْفَظَ شَيْئًا وَاحِدًا مِنْ ثَقَافَتِكَ لِلْمُسْتَقْبَلِ، فَمَا هُوَ؟</a:t>
@@ -15225,6 +15351,7 @@
                   <a:srgbClr val="D4AF37"/>
                 </a:solidFill>
                 <a:latin typeface="Amiri" pitchFamily="2" charset="-78"/>
+                <a:ea typeface="Amiri" pitchFamily="2" charset="-78"/>
                 <a:cs typeface="Amiri" pitchFamily="2" charset="-78"/>
               </a:rPr>
               <a:t>م</a:t>
@@ -15545,6 +15672,7 @@
                   <a:srgbClr val="8A6D1E"/>
                 </a:solidFill>
                 <a:latin typeface="Amiri" pitchFamily="2" charset="-78"/>
+                <a:ea typeface="Amiri" pitchFamily="2" charset="-78"/>
                 <a:cs typeface="Amiri" pitchFamily="2" charset="-78"/>
               </a:rPr>
               <a:t>ثَقَافَتِي</a:t>
@@ -15825,6 +15953,7 @@
                   <a:srgbClr val="1B3B6F"/>
                 </a:solidFill>
                 <a:latin typeface="Amiri" pitchFamily="2" charset="-78"/>
+                <a:ea typeface="Amiri" pitchFamily="2" charset="-78"/>
                 <a:cs typeface="Amiri" pitchFamily="2" charset="-78"/>
               </a:rPr>
               <a:t>ثَقَافَتِي … وَ…</a:t>
@@ -15901,6 +16030,7 @@
                   <a:srgbClr val="1B3B6F"/>
                 </a:solidFill>
                 <a:latin typeface="Amiri" pitchFamily="2" charset="-78"/>
+                <a:ea typeface="Amiri" pitchFamily="2" charset="-78"/>
                 <a:cs typeface="Amiri" pitchFamily="2" charset="-78"/>
               </a:rPr>
               <a:t>صِفْ ثَقَافَتَكَ بِكَلِمَتَيْنِ.</a:t>
@@ -16069,6 +16199,7 @@
                   <a:srgbClr val="1B3B6F"/>
                 </a:solidFill>
                 <a:latin typeface="Amiri" pitchFamily="2" charset="-78"/>
+                <a:ea typeface="Amiri" pitchFamily="2" charset="-78"/>
                 <a:cs typeface="Amiri" pitchFamily="2" charset="-78"/>
               </a:rPr>
               <a:t>أَكْلَتِي المُفَضَّلَةُ …</a:t>
@@ -16145,6 +16276,7 @@
                   <a:srgbClr val="1B3B6F"/>
                 </a:solidFill>
                 <a:latin typeface="Amiri" pitchFamily="2" charset="-78"/>
+                <a:ea typeface="Amiri" pitchFamily="2" charset="-78"/>
                 <a:cs typeface="Amiri" pitchFamily="2" charset="-78"/>
               </a:rPr>
               <a:t>مَا أَكْلَتُكَ المُفَضَّلَةُ مِنْ ثَقَافَتِكَ؟</a:t>
@@ -16313,6 +16445,7 @@
                   <a:srgbClr val="1B3B6F"/>
                 </a:solidFill>
                 <a:latin typeface="Amiri" pitchFamily="2" charset="-78"/>
+                <a:ea typeface="Amiri" pitchFamily="2" charset="-78"/>
                 <a:cs typeface="Amiri" pitchFamily="2" charset="-78"/>
               </a:rPr>
               <a:t>نَعَمْ، أَلْبَسُ … فِي …</a:t>
@@ -16389,6 +16522,7 @@
                   <a:srgbClr val="1B3B6F"/>
                 </a:solidFill>
                 <a:latin typeface="Amiri" pitchFamily="2" charset="-78"/>
+                <a:ea typeface="Amiri" pitchFamily="2" charset="-78"/>
                 <a:cs typeface="Amiri" pitchFamily="2" charset="-78"/>
               </a:rPr>
               <a:t>هَلْ تَلْبَسُ مَلَابِسَ تَقْلِيدِيَّةً؟</a:t>
@@ -16557,6 +16691,7 @@
                   <a:srgbClr val="1B3B6F"/>
                 </a:solidFill>
                 <a:latin typeface="Amiri" pitchFamily="2" charset="-78"/>
+                <a:ea typeface="Amiri" pitchFamily="2" charset="-78"/>
                 <a:cs typeface="Amiri" pitchFamily="2" charset="-78"/>
               </a:rPr>
               <a:t>لُغَةُ أَجْدَادِي …</a:t>
@@ -16633,6 +16768,7 @@
                   <a:srgbClr val="1B3B6F"/>
                 </a:solidFill>
                 <a:latin typeface="Amiri" pitchFamily="2" charset="-78"/>
+                <a:ea typeface="Amiri" pitchFamily="2" charset="-78"/>
                 <a:cs typeface="Amiri" pitchFamily="2" charset="-78"/>
               </a:rPr>
               <a:t>مَا لُغَةُ أَجْدَادِكَ؟</a:t>
@@ -16801,6 +16937,7 @@
                   <a:srgbClr val="1B3B6F"/>
                 </a:solidFill>
                 <a:latin typeface="Amiri" pitchFamily="2" charset="-78"/>
+                <a:ea typeface="Amiri" pitchFamily="2" charset="-78"/>
                 <a:cs typeface="Amiri" pitchFamily="2" charset="-78"/>
               </a:rPr>
               <a:t>نَعَمْ، أَنَا فَخُورٌ … لِأَنَّ …</a:t>
@@ -16877,6 +17014,7 @@
                   <a:srgbClr val="1B3B6F"/>
                 </a:solidFill>
                 <a:latin typeface="Amiri" pitchFamily="2" charset="-78"/>
+                <a:ea typeface="Amiri" pitchFamily="2" charset="-78"/>
                 <a:cs typeface="Amiri" pitchFamily="2" charset="-78"/>
               </a:rPr>
               <a:t>هَلْ أَنْتَ فَخُورٌ بِثَقَافَتِكَ؟</a:t>
@@ -17031,6 +17169,7 @@
                   <a:srgbClr val="1B3B6F"/>
                 </a:solidFill>
                 <a:latin typeface="Amiri" pitchFamily="2" charset="-78"/>
+                <a:ea typeface="Amiri" pitchFamily="2" charset="-78"/>
                 <a:cs typeface="Amiri" pitchFamily="2" charset="-78"/>
               </a:rPr>
               <a:t>ـِي</a:t>
@@ -17057,6 +17196,7 @@
                   <a:srgbClr val="1B3B6F"/>
                 </a:solidFill>
                 <a:latin typeface="Amiri" pitchFamily="2" charset="-78"/>
+                <a:ea typeface="Amiri" pitchFamily="2" charset="-78"/>
                 <a:cs typeface="Amiri" pitchFamily="2" charset="-78"/>
               </a:rPr>
               <a:t>ـُنَا</a:t>
@@ -17083,6 +17223,7 @@
                   <a:srgbClr val="1B3B6F"/>
                 </a:solidFill>
                 <a:latin typeface="Amiri" pitchFamily="2" charset="-78"/>
+                <a:ea typeface="Amiri" pitchFamily="2" charset="-78"/>
                 <a:cs typeface="Amiri" pitchFamily="2" charset="-78"/>
               </a:rPr>
               <a:t>عَفْوًا، هَلْ يُمْكِنُ أَنْ تُعِيدَ السُّؤَالَ؟</a:t>
@@ -17216,6 +17357,7 @@
                   <a:srgbClr val="D4AF37"/>
                 </a:solidFill>
                 <a:latin typeface="Amiri" pitchFamily="2" charset="-78"/>
+                <a:ea typeface="Amiri" pitchFamily="2" charset="-78"/>
                 <a:cs typeface="Amiri" pitchFamily="2" charset="-78"/>
               </a:rPr>
               <a:t>م</a:t>
@@ -17536,6 +17678,7 @@
                   <a:srgbClr val="8A6D1E"/>
                 </a:solidFill>
                 <a:latin typeface="Amiri" pitchFamily="2" charset="-78"/>
+                <a:ea typeface="Amiri" pitchFamily="2" charset="-78"/>
                 <a:cs typeface="Amiri" pitchFamily="2" charset="-78"/>
               </a:rPr>
               <a:t>هُوِيَّتِي وَعَادَاتُنَا</a:t>
@@ -17816,6 +17959,7 @@
                   <a:srgbClr val="1B3B6F"/>
                 </a:solidFill>
                 <a:latin typeface="Amiri" pitchFamily="2" charset="-78"/>
+                <a:ea typeface="Amiri" pitchFamily="2" charset="-78"/>
                 <a:cs typeface="Amiri" pitchFamily="2" charset="-78"/>
               </a:rPr>
               <a:t>أُحِبُّ … لِأَنَّ … مَثَلًا …</a:t>
@@ -17892,6 +18036,7 @@
                   <a:srgbClr val="1B3B6F"/>
                 </a:solidFill>
                 <a:latin typeface="Amiri" pitchFamily="2" charset="-78"/>
+                <a:ea typeface="Amiri" pitchFamily="2" charset="-78"/>
                 <a:cs typeface="Amiri" pitchFamily="2" charset="-78"/>
               </a:rPr>
               <a:t>مَا التَّقَالِيدُ الَّتِي تُحِبُّهَا فِي أُسْرَتِكَ؟</a:t>
@@ -17995,6 +18140,7 @@
                   <a:srgbClr val="1B3B6F"/>
                 </a:solidFill>
                 <a:latin typeface="Amiri" pitchFamily="2" charset="-78"/>
+                <a:ea typeface="Amiri" pitchFamily="2" charset="-78"/>
                 <a:cs typeface="Amiri" pitchFamily="2" charset="-78"/>
               </a:rPr>
               <a:t>فِي ثَقَافَتِنَا … بَيْنَمَا فِي ثَقَافَتِهِمْ …</a:t>
@@ -18071,6 +18217,7 @@
                   <a:srgbClr val="1B3B6F"/>
                 </a:solidFill>
                 <a:latin typeface="Amiri" pitchFamily="2" charset="-78"/>
+                <a:ea typeface="Amiri" pitchFamily="2" charset="-78"/>
                 <a:cs typeface="Amiri" pitchFamily="2" charset="-78"/>
               </a:rPr>
               <a:t>كَيْفَ تَخْتَلِفُ ثَقَافَتُكَ عَنْ ثَقَافَةِ أَصْدِقَائِكَ؟</a:t>
@@ -18174,6 +18321,7 @@
                   <a:srgbClr val="1B3B6F"/>
                 </a:solidFill>
                 <a:latin typeface="Amiri" pitchFamily="2" charset="-78"/>
+                <a:ea typeface="Amiri" pitchFamily="2" charset="-78"/>
                 <a:cs typeface="Amiri" pitchFamily="2" charset="-78"/>
               </a:rPr>
               <a:t>كُنْتُ … أَمَّا الآنَ فَأَقْرَأُ …</a:t>
@@ -18250,6 +18398,7 @@
                   <a:srgbClr val="1B3B6F"/>
                 </a:solidFill>
                 <a:latin typeface="Amiri" pitchFamily="2" charset="-78"/>
+                <a:ea typeface="Amiri" pitchFamily="2" charset="-78"/>
                 <a:cs typeface="Amiri" pitchFamily="2" charset="-78"/>
               </a:rPr>
               <a:t>هَلْ تَغَيَّرَتْ عَلَاقَتُكَ بِثَقَافَتِكَ؟</a:t>
@@ -18353,6 +18502,7 @@
                   <a:srgbClr val="1B3B6F"/>
                 </a:solidFill>
                 <a:latin typeface="Amiri" pitchFamily="2" charset="-78"/>
+                <a:ea typeface="Amiri" pitchFamily="2" charset="-78"/>
                 <a:cs typeface="Amiri" pitchFamily="2" charset="-78"/>
               </a:rPr>
               <a:t>تَعَلَّمْتُ مِنْهُمَا … مِثْلَ …</a:t>
@@ -18429,6 +18579,7 @@
                   <a:srgbClr val="1B3B6F"/>
                 </a:solidFill>
                 <a:latin typeface="Amiri" pitchFamily="2" charset="-78"/>
+                <a:ea typeface="Amiri" pitchFamily="2" charset="-78"/>
                 <a:cs typeface="Amiri" pitchFamily="2" charset="-78"/>
               </a:rPr>
               <a:t>مَا القِيَمُ الَّتِي تَعَلَّمْتَهَا مِنْ وَالِدَيْكَ؟</a:t>
@@ -18532,6 +18683,7 @@
                   <a:srgbClr val="1B3B6F"/>
                 </a:solidFill>
                 <a:latin typeface="Amiri" pitchFamily="2" charset="-78"/>
+                <a:ea typeface="Amiri" pitchFamily="2" charset="-78"/>
                 <a:cs typeface="Amiri" pitchFamily="2" charset="-78"/>
               </a:rPr>
               <a:t>سَأُعَلِّمُهُمْ … وَسَآخُذُهُمْ …</a:t>
@@ -18608,6 +18760,7 @@
                   <a:srgbClr val="1B3B6F"/>
                 </a:solidFill>
                 <a:latin typeface="Amiri" pitchFamily="2" charset="-78"/>
+                <a:ea typeface="Amiri" pitchFamily="2" charset="-78"/>
                 <a:cs typeface="Amiri" pitchFamily="2" charset="-78"/>
               </a:rPr>
               <a:t>كَيْفَ سَتَنْقُلُ ثَقَافَتَكَ إِلَى أَوْلَادِكَ؟</a:t>
@@ -18817,6 +18970,7 @@
                   <a:srgbClr val="D4AF37"/>
                 </a:solidFill>
                 <a:latin typeface="Amiri" pitchFamily="2" charset="-78"/>
+                <a:ea typeface="Amiri" pitchFamily="2" charset="-78"/>
                 <a:cs typeface="Amiri" pitchFamily="2" charset="-78"/>
               </a:rPr>
               <a:t>م</a:t>
@@ -19137,6 +19291,7 @@
                   <a:srgbClr val="8A6D1E"/>
                 </a:solidFill>
                 <a:latin typeface="Amiri" pitchFamily="2" charset="-78"/>
+                <a:ea typeface="Amiri" pitchFamily="2" charset="-78"/>
                 <a:cs typeface="Amiri" pitchFamily="2" charset="-78"/>
               </a:rPr>
               <a:t>الهُوِيَّةُ فِي عَالَمٍ مُتَغَيِّرٍ</a:t>
@@ -19417,6 +19572,7 @@
                   <a:srgbClr val="1B3B6F"/>
                 </a:solidFill>
                 <a:latin typeface="Amiri" pitchFamily="2" charset="-78"/>
+                <a:ea typeface="Amiri" pitchFamily="2" charset="-78"/>
                 <a:cs typeface="Amiri" pitchFamily="2" charset="-78"/>
               </a:rPr>
               <a:t>إِنَّ الهُوِيَّةَ … ؛ فَمَثَلًا …</a:t>
@@ -19493,6 +19649,7 @@
                   <a:srgbClr val="1B3B6F"/>
                 </a:solidFill>
                 <a:latin typeface="Amiri" pitchFamily="2" charset="-78"/>
+                <a:ea typeface="Amiri" pitchFamily="2" charset="-78"/>
                 <a:cs typeface="Amiri" pitchFamily="2" charset="-78"/>
               </a:rPr>
               <a:t>هَلْ يُمْكِنُ أَنْ يَكُونَ لِلْإِنْسَانِ أَكْثَرُ مِنْ هُوِيَّةٍ؟</a:t>
@@ -19596,6 +19753,7 @@
                   <a:srgbClr val="1B3B6F"/>
                 </a:solidFill>
                 <a:latin typeface="Amiri" pitchFamily="2" charset="-78"/>
+                <a:ea typeface="Amiri" pitchFamily="2" charset="-78"/>
                 <a:cs typeface="Amiri" pitchFamily="2" charset="-78"/>
               </a:rPr>
               <a:t>أَظُنُّ أَنَّ … بِسَبَبِ … مِمَّا …</a:t>
@@ -19672,6 +19830,7 @@
                   <a:srgbClr val="1B3B6F"/>
                 </a:solidFill>
                 <a:latin typeface="Amiri" pitchFamily="2" charset="-78"/>
+                <a:ea typeface="Amiri" pitchFamily="2" charset="-78"/>
                 <a:cs typeface="Amiri" pitchFamily="2" charset="-78"/>
               </a:rPr>
               <a:t>مَا الَّذِي يُهَدِّدُ الثَّقَافَاتِ التَّقْلِيدِيَّةَ؟</a:t>
@@ -19775,6 +19934,7 @@
                   <a:srgbClr val="1B3B6F"/>
                 </a:solidFill>
                 <a:latin typeface="Amiri" pitchFamily="2" charset="-78"/>
+                <a:ea typeface="Amiri" pitchFamily="2" charset="-78"/>
                 <a:cs typeface="Amiri" pitchFamily="2" charset="-78"/>
               </a:rPr>
               <a:t>صَحِيحٌ أَنَّ … غَيْرَ أَنَّ …</a:t>
@@ -19851,6 +20011,7 @@
                   <a:srgbClr val="1B3B6F"/>
                 </a:solidFill>
                 <a:latin typeface="Amiri" pitchFamily="2" charset="-78"/>
+                <a:ea typeface="Amiri" pitchFamily="2" charset="-78"/>
                 <a:cs typeface="Amiri" pitchFamily="2" charset="-78"/>
               </a:rPr>
               <a:t>هَلْ يَجِبُ أَنْ يَتَخَلَّى المُهَاجِرُ عَنْ ثَقَافَتِهِ؟</a:t>
@@ -19954,6 +20115,7 @@
                   <a:srgbClr val="1B3B6F"/>
                 </a:solidFill>
                 <a:latin typeface="Amiri" pitchFamily="2" charset="-78"/>
+                <a:ea typeface="Amiri" pitchFamily="2" charset="-78"/>
                 <a:cs typeface="Amiri" pitchFamily="2" charset="-78"/>
               </a:rPr>
               <a:t>تُؤَثِّرُ … ؛ مَثَلًا، عِنْدَمَا …</a:t>
@@ -20030,6 +20192,7 @@
                   <a:srgbClr val="1B3B6F"/>
                 </a:solidFill>
                 <a:latin typeface="Amiri" pitchFamily="2" charset="-78"/>
+                <a:ea typeface="Amiri" pitchFamily="2" charset="-78"/>
                 <a:cs typeface="Amiri" pitchFamily="2" charset="-78"/>
               </a:rPr>
               <a:t>كَيْفَ تُؤَثِّرُ ثَقَافَتُكَ فِي قَرَارَاتِكَ؟</a:t>
@@ -20133,6 +20296,7 @@
                   <a:srgbClr val="1B3B6F"/>
                 </a:solidFill>
                 <a:latin typeface="Amiri" pitchFamily="2" charset="-78"/>
+                <a:ea typeface="Amiri" pitchFamily="2" charset="-78"/>
                 <a:cs typeface="Amiri" pitchFamily="2" charset="-78"/>
               </a:rPr>
               <a:t>لَوْ عِشْتُ هُنَاكَ، لَكَانَتْ … لٰكِنَّ …</a:t>
@@ -20209,6 +20373,7 @@
                   <a:srgbClr val="1B3B6F"/>
                 </a:solidFill>
                 <a:latin typeface="Amiri" pitchFamily="2" charset="-78"/>
+                <a:ea typeface="Amiri" pitchFamily="2" charset="-78"/>
                 <a:cs typeface="Amiri" pitchFamily="2" charset="-78"/>
               </a:rPr>
               <a:t>لَوْ عِشْتَ فِي بَلَدِ أَجْدَادِكَ، هَلْ سَتَكُونُ شَخْصًا مُخْتَلِفًا؟</a:t>
@@ -20418,6 +20583,7 @@
                   <a:srgbClr val="D4AF37"/>
                 </a:solidFill>
                 <a:latin typeface="Amiri" pitchFamily="2" charset="-78"/>
+                <a:ea typeface="Amiri" pitchFamily="2" charset="-78"/>
                 <a:cs typeface="Amiri" pitchFamily="2" charset="-78"/>
               </a:rPr>
               <a:t>م</a:t>
@@ -20738,6 +20904,7 @@
                   <a:srgbClr val="8A6D1E"/>
                 </a:solidFill>
                 <a:latin typeface="Amiri" pitchFamily="2" charset="-78"/>
+                <a:ea typeface="Amiri" pitchFamily="2" charset="-78"/>
                 <a:cs typeface="Amiri" pitchFamily="2" charset="-78"/>
               </a:rPr>
               <a:t>آدَابُ الصَّفِّ</a:t>
@@ -22269,6 +22436,7 @@
                   <a:srgbClr val="D4AF37"/>
                 </a:solidFill>
                 <a:latin typeface="Amiri" pitchFamily="2" charset="-78"/>
+                <a:ea typeface="Amiri" pitchFamily="2" charset="-78"/>
                 <a:cs typeface="Amiri" pitchFamily="2" charset="-78"/>
               </a:rPr>
               <a:t>م</a:t>
@@ -22589,6 +22757,7 @@
                   <a:srgbClr val="8A6D1E"/>
                 </a:solidFill>
                 <a:latin typeface="Amiri" pitchFamily="2" charset="-78"/>
+                <a:ea typeface="Amiri" pitchFamily="2" charset="-78"/>
                 <a:cs typeface="Amiri" pitchFamily="2" charset="-78"/>
               </a:rPr>
               <a:t>نَمُوذَجُ الإِجَابَةِ</a:t>
@@ -22831,6 +23000,7 @@
                   <a:srgbClr val="1B3B6F"/>
                 </a:solidFill>
                 <a:latin typeface="Amiri" pitchFamily="2" charset="-78"/>
+                <a:ea typeface="Amiri" pitchFamily="2" charset="-78"/>
                 <a:cs typeface="Amiri" pitchFamily="2" charset="-78"/>
               </a:rPr>
               <a:t>ثَقَافَتِي غَنِيَّةٌ وَجَمِيلَةٌ.</a:t>
@@ -22907,6 +23077,7 @@
                   <a:srgbClr val="1B3B6F"/>
                 </a:solidFill>
                 <a:latin typeface="Amiri" pitchFamily="2" charset="-78"/>
+                <a:ea typeface="Amiri" pitchFamily="2" charset="-78"/>
                 <a:cs typeface="Amiri" pitchFamily="2" charset="-78"/>
               </a:rPr>
               <a:t>صِفْ ثَقَافَتَكَ بِكَلِمَتَيْنِ.</a:t>
@@ -23010,6 +23181,7 @@
                   <a:srgbClr val="1B3B6F"/>
                 </a:solidFill>
                 <a:latin typeface="Amiri" pitchFamily="2" charset="-78"/>
+                <a:ea typeface="Amiri" pitchFamily="2" charset="-78"/>
                 <a:cs typeface="Amiri" pitchFamily="2" charset="-78"/>
               </a:rPr>
               <a:t>أَكْلَتِيَ المُفَضَّلَةُ الكُسْكُسُ، لِأَنَّ أُمِّي تَطْبُخُهُ يَوْمَ الجُمُعَةِ.</a:t>
@@ -23086,6 +23258,7 @@
                   <a:srgbClr val="1B3B6F"/>
                 </a:solidFill>
                 <a:latin typeface="Amiri" pitchFamily="2" charset="-78"/>
+                <a:ea typeface="Amiri" pitchFamily="2" charset="-78"/>
                 <a:cs typeface="Amiri" pitchFamily="2" charset="-78"/>
               </a:rPr>
               <a:t>مَا أَكْلَتُكَ المُفَضَّلَةُ مِنْ ثَقَافَتِكَ؟</a:t>
@@ -23189,6 +23362,7 @@
                   <a:srgbClr val="1B3B6F"/>
                 </a:solidFill>
                 <a:latin typeface="Amiri" pitchFamily="2" charset="-78"/>
+                <a:ea typeface="Amiri" pitchFamily="2" charset="-78"/>
                 <a:cs typeface="Amiri" pitchFamily="2" charset="-78"/>
               </a:rPr>
               <a:t>نَعَمْ، أَلْبَسُ الجَلَّابِيَّةَ فِي العِيدِ.</a:t>
@@ -23265,6 +23439,7 @@
                   <a:srgbClr val="1B3B6F"/>
                 </a:solidFill>
                 <a:latin typeface="Amiri" pitchFamily="2" charset="-78"/>
+                <a:ea typeface="Amiri" pitchFamily="2" charset="-78"/>
                 <a:cs typeface="Amiri" pitchFamily="2" charset="-78"/>
               </a:rPr>
               <a:t>هَلْ تَلْبَسُ مَلَابِسَ تَقْلِيدِيَّةً؟</a:t>
@@ -23368,6 +23543,7 @@
                   <a:srgbClr val="1B3B6F"/>
                 </a:solidFill>
                 <a:latin typeface="Amiri" pitchFamily="2" charset="-78"/>
+                <a:ea typeface="Amiri" pitchFamily="2" charset="-78"/>
                 <a:cs typeface="Amiri" pitchFamily="2" charset="-78"/>
               </a:rPr>
               <a:t>لُغَةُ أَجْدَادِي العَرَبِيَّةُ.</a:t>
@@ -23444,6 +23620,7 @@
                   <a:srgbClr val="1B3B6F"/>
                 </a:solidFill>
                 <a:latin typeface="Amiri" pitchFamily="2" charset="-78"/>
+                <a:ea typeface="Amiri" pitchFamily="2" charset="-78"/>
                 <a:cs typeface="Amiri" pitchFamily="2" charset="-78"/>
               </a:rPr>
               <a:t>مَا لُغَةُ أَجْدَادِكَ؟</a:t>
@@ -23547,6 +23724,7 @@
                   <a:srgbClr val="1B3B6F"/>
                 </a:solidFill>
                 <a:latin typeface="Amiri" pitchFamily="2" charset="-78"/>
+                <a:ea typeface="Amiri" pitchFamily="2" charset="-78"/>
                 <a:cs typeface="Amiri" pitchFamily="2" charset="-78"/>
               </a:rPr>
               <a:t>نَعَمْ، أَنَا فَخُورٌ بِهَا، لِأَنَّهَا جُزْءٌ مِنِّي.</a:t>
@@ -23623,6 +23801,7 @@
                   <a:srgbClr val="1B3B6F"/>
                 </a:solidFill>
                 <a:latin typeface="Amiri" pitchFamily="2" charset="-78"/>
+                <a:ea typeface="Amiri" pitchFamily="2" charset="-78"/>
                 <a:cs typeface="Amiri" pitchFamily="2" charset="-78"/>
               </a:rPr>
               <a:t>هَلْ أَنْتَ فَخُورٌ بِثَقَافَتِكَ؟</a:t>
@@ -23832,6 +24011,7 @@
                   <a:srgbClr val="D4AF37"/>
                 </a:solidFill>
                 <a:latin typeface="Amiri" pitchFamily="2" charset="-78"/>
+                <a:ea typeface="Amiri" pitchFamily="2" charset="-78"/>
                 <a:cs typeface="Amiri" pitchFamily="2" charset="-78"/>
               </a:rPr>
               <a:t>م</a:t>
@@ -24152,6 +24332,7 @@
                   <a:srgbClr val="8A6D1E"/>
                 </a:solidFill>
                 <a:latin typeface="Amiri" pitchFamily="2" charset="-78"/>
+                <a:ea typeface="Amiri" pitchFamily="2" charset="-78"/>
                 <a:cs typeface="Amiri" pitchFamily="2" charset="-78"/>
               </a:rPr>
               <a:t>نَمُوذَجُ الإِجَابَةِ</a:t>
@@ -24394,6 +24575,7 @@
                   <a:srgbClr val="1B3B6F"/>
                 </a:solidFill>
                 <a:latin typeface="Amiri" pitchFamily="2" charset="-78"/>
+                <a:ea typeface="Amiri" pitchFamily="2" charset="-78"/>
                 <a:cs typeface="Amiri" pitchFamily="2" charset="-78"/>
               </a:rPr>
               <a:t>أُحِبُّ اجْتِمَاعَنَا فِي بَيْتِ جَدَّتِي، لِأَنَّهُ يُقَرِّبُنَا؛ مَثَلًا، نَطْبُخُ مَعًا وَنَحْكِي القِصَصَ.</a:t>
@@ -24470,6 +24652,7 @@
                   <a:srgbClr val="1B3B6F"/>
                 </a:solidFill>
                 <a:latin typeface="Amiri" pitchFamily="2" charset="-78"/>
+                <a:ea typeface="Amiri" pitchFamily="2" charset="-78"/>
                 <a:cs typeface="Amiri" pitchFamily="2" charset="-78"/>
               </a:rPr>
               <a:t>مَا التَّقَالِيدُ الَّتِي تُحِبُّهَا فِي أُسْرَتِكَ؟</a:t>
@@ -24573,6 +24756,7 @@
                   <a:srgbClr val="1B3B6F"/>
                 </a:solidFill>
                 <a:latin typeface="Amiri" pitchFamily="2" charset="-78"/>
+                <a:ea typeface="Amiri" pitchFamily="2" charset="-78"/>
                 <a:cs typeface="Amiri" pitchFamily="2" charset="-78"/>
               </a:rPr>
               <a:t>فِي ثَقَافَتِنَا نَأْكُلُ العَشَاءَ مُتَأَخِّرِينَ مَعَ كُلِّ الأُسْرَةِ، بَيْنَمَا يَأْكُلُ أَصْدِقَائِي مُبَكِّرًا، وَأَحْيَانًا أَمَامَ التِّلْفَازِ.</a:t>
@@ -24649,6 +24833,7 @@
                   <a:srgbClr val="1B3B6F"/>
                 </a:solidFill>
                 <a:latin typeface="Amiri" pitchFamily="2" charset="-78"/>
+                <a:ea typeface="Amiri" pitchFamily="2" charset="-78"/>
                 <a:cs typeface="Amiri" pitchFamily="2" charset="-78"/>
               </a:rPr>
               <a:t>كَيْفَ تَخْتَلِفُ ثَقَافَتُكَ عَنْ ثَقَافَةِ أَصْدِقَائِكَ؟</a:t>
@@ -24752,6 +24937,7 @@
                   <a:srgbClr val="1B3B6F"/>
                 </a:solidFill>
                 <a:latin typeface="Amiri" pitchFamily="2" charset="-78"/>
+                <a:ea typeface="Amiri" pitchFamily="2" charset="-78"/>
                 <a:cs typeface="Amiri" pitchFamily="2" charset="-78"/>
               </a:rPr>
               <a:t>كُنْتُ لَا أَهْتَمُّ بِهَا، أَمَّا الآنَ فَأَقْرَأُ عَنْ تَارِيخِ بَلَدِ أَجْدَادِي، لِأَنَّنِي أُرِيدُ أَنْ أَفْهَمَ جُذُورِي.</a:t>
@@ -24828,6 +25014,7 @@
                   <a:srgbClr val="1B3B6F"/>
                 </a:solidFill>
                 <a:latin typeface="Amiri" pitchFamily="2" charset="-78"/>
+                <a:ea typeface="Amiri" pitchFamily="2" charset="-78"/>
                 <a:cs typeface="Amiri" pitchFamily="2" charset="-78"/>
               </a:rPr>
               <a:t>هَلْ تَغَيَّرَتْ عَلَاقَتُكَ بِثَقَافَتِكَ؟</a:t>
@@ -24931,6 +25118,7 @@
                   <a:srgbClr val="1B3B6F"/>
                 </a:solidFill>
                 <a:latin typeface="Amiri" pitchFamily="2" charset="-78"/>
+                <a:ea typeface="Amiri" pitchFamily="2" charset="-78"/>
                 <a:cs typeface="Amiri" pitchFamily="2" charset="-78"/>
               </a:rPr>
               <a:t>تَعَلَّمْتُ مِنْهُمَا قِيَمًا كَثِيرَةً، مِثْلَ احْتِرَامِ الكِبَارِ وَمُسَاعَدَةِ الجِيرَانِ وَالصِّدْقِ.</a:t>
@@ -25007,6 +25195,7 @@
                   <a:srgbClr val="1B3B6F"/>
                 </a:solidFill>
                 <a:latin typeface="Amiri" pitchFamily="2" charset="-78"/>
+                <a:ea typeface="Amiri" pitchFamily="2" charset="-78"/>
                 <a:cs typeface="Amiri" pitchFamily="2" charset="-78"/>
               </a:rPr>
               <a:t>مَا القِيَمُ الَّتِي تَعَلَّمْتَهَا مِنْ وَالِدَيْكَ؟</a:t>
@@ -25110,6 +25299,7 @@
                   <a:srgbClr val="1B3B6F"/>
                 </a:solidFill>
                 <a:latin typeface="Amiri" pitchFamily="2" charset="-78"/>
+                <a:ea typeface="Amiri" pitchFamily="2" charset="-78"/>
                 <a:cs typeface="Amiri" pitchFamily="2" charset="-78"/>
               </a:rPr>
               <a:t>سَأُعَلِّمُهُمْ لُغَتَنَا وَأَكَلَاتِنَا، وَسَآخُذُهُمْ إِلَى بَلَدِ أَجْدَادِهِمْ كُلَّ صَيْفٍ.</a:t>
@@ -25186,6 +25376,7 @@
                   <a:srgbClr val="1B3B6F"/>
                 </a:solidFill>
                 <a:latin typeface="Amiri" pitchFamily="2" charset="-78"/>
+                <a:ea typeface="Amiri" pitchFamily="2" charset="-78"/>
                 <a:cs typeface="Amiri" pitchFamily="2" charset="-78"/>
               </a:rPr>
               <a:t>كَيْفَ سَتَنْقُلُ ثَقَافَتَكَ إِلَى أَوْلَادِكَ؟</a:t>
@@ -25395,6 +25586,7 @@
                   <a:srgbClr val="D4AF37"/>
                 </a:solidFill>
                 <a:latin typeface="Amiri" pitchFamily="2" charset="-78"/>
+                <a:ea typeface="Amiri" pitchFamily="2" charset="-78"/>
                 <a:cs typeface="Amiri" pitchFamily="2" charset="-78"/>
               </a:rPr>
               <a:t>م</a:t>
@@ -25715,6 +25907,7 @@
                   <a:srgbClr val="8A6D1E"/>
                 </a:solidFill>
                 <a:latin typeface="Amiri" pitchFamily="2" charset="-78"/>
+                <a:ea typeface="Amiri" pitchFamily="2" charset="-78"/>
                 <a:cs typeface="Amiri" pitchFamily="2" charset="-78"/>
               </a:rPr>
               <a:t>نَمُوذَجُ الإِجَابَةِ</a:t>
@@ -25957,6 +26150,7 @@
                   <a:srgbClr val="1B3B6F"/>
                 </a:solidFill>
                 <a:latin typeface="Amiri" pitchFamily="2" charset="-78"/>
+                <a:ea typeface="Amiri" pitchFamily="2" charset="-78"/>
                 <a:cs typeface="Amiri" pitchFamily="2" charset="-78"/>
               </a:rPr>
               <a:t>إِنَّ الهُوِيَّةَ لَيْسَتْ وَاحِدَةً، بَلْ طَبَقَاتٌ؛ فَمَثَلًا، أَنَا مُسْلِمٌ وَعَرَبِيٌّ وَبَرِيطَانِيٌّ وَمُحِبٌّ لِكُرَةِ القَدَمِ فِي الوَقْتِ نَفْسِهِ.</a:t>
@@ -26033,6 +26227,7 @@
                   <a:srgbClr val="1B3B6F"/>
                 </a:solidFill>
                 <a:latin typeface="Amiri" pitchFamily="2" charset="-78"/>
+                <a:ea typeface="Amiri" pitchFamily="2" charset="-78"/>
                 <a:cs typeface="Amiri" pitchFamily="2" charset="-78"/>
               </a:rPr>
               <a:t>هَلْ يُمْكِنُ أَنْ يَكُونَ لِلْإِنْسَانِ أَكْثَرُ مِنْ هُوِيَّةٍ؟</a:t>
@@ -26136,6 +26331,7 @@
                   <a:srgbClr val="1B3B6F"/>
                 </a:solidFill>
                 <a:latin typeface="Amiri" pitchFamily="2" charset="-78"/>
+                <a:ea typeface="Amiri" pitchFamily="2" charset="-78"/>
                 <a:cs typeface="Amiri" pitchFamily="2" charset="-78"/>
               </a:rPr>
               <a:t>أَظُنُّ أَنَّ السُّرْعَةَ هِيَ الخَطَرُ الأَكْبَرُ؛ فَبِسَبَبِ ضَغْطِ الحَيَاةِ لَا يَجِدُ النَّاسُ وَقْتًا لِلطَّبْخِ وَالزِّيَارَاتِ، مِمَّا يُضْعِفُ العَادَاتِ.</a:t>
@@ -26212,6 +26408,7 @@
                   <a:srgbClr val="1B3B6F"/>
                 </a:solidFill>
                 <a:latin typeface="Amiri" pitchFamily="2" charset="-78"/>
+                <a:ea typeface="Amiri" pitchFamily="2" charset="-78"/>
                 <a:cs typeface="Amiri" pitchFamily="2" charset="-78"/>
               </a:rPr>
               <a:t>مَا الَّذِي يُهَدِّدُ الثَّقَافَاتِ التَّقْلِيدِيَّةَ؟</a:t>
@@ -26315,6 +26512,7 @@
                   <a:srgbClr val="1B3B6F"/>
                 </a:solidFill>
                 <a:latin typeface="Amiri" pitchFamily="2" charset="-78"/>
+                <a:ea typeface="Amiri" pitchFamily="2" charset="-78"/>
                 <a:cs typeface="Amiri" pitchFamily="2" charset="-78"/>
               </a:rPr>
               <a:t>صَحِيحٌ أَنَّ عَلَيْهِ أَنْ يَحْتَرِمَ قَوَانِينَ البَلَدِ الجَدِيدِ وَيَتَعَلَّمَ لُغَتَهُ، غَيْرَ أَنَّ التَّخَلِّيَ عَنِ الجُذُورِ يَجْعَلُهُ شَجَرَةً بِلَا أَصْلٍ.</a:t>
@@ -26391,6 +26589,7 @@
                   <a:srgbClr val="1B3B6F"/>
                 </a:solidFill>
                 <a:latin typeface="Amiri" pitchFamily="2" charset="-78"/>
+                <a:ea typeface="Amiri" pitchFamily="2" charset="-78"/>
                 <a:cs typeface="Amiri" pitchFamily="2" charset="-78"/>
               </a:rPr>
               <a:t>هَلْ يَجِبُ أَنْ يَتَخَلَّى المُهَاجِرُ عَنْ ثَقَافَتِهِ؟</a:t>
@@ -26600,6 +26799,7 @@
                   <a:srgbClr val="D4AF37"/>
                 </a:solidFill>
                 <a:latin typeface="Amiri" pitchFamily="2" charset="-78"/>
+                <a:ea typeface="Amiri" pitchFamily="2" charset="-78"/>
                 <a:cs typeface="Amiri" pitchFamily="2" charset="-78"/>
               </a:rPr>
               <a:t>م</a:t>
@@ -26920,6 +27120,7 @@
                   <a:srgbClr val="8A6D1E"/>
                 </a:solidFill>
                 <a:latin typeface="Amiri" pitchFamily="2" charset="-78"/>
+                <a:ea typeface="Amiri" pitchFamily="2" charset="-78"/>
                 <a:cs typeface="Amiri" pitchFamily="2" charset="-78"/>
               </a:rPr>
               <a:t>نَمُوذَجُ الإِجَابَةِ</a:t>
@@ -27162,6 +27363,7 @@
                   <a:srgbClr val="1B3B6F"/>
                 </a:solidFill>
                 <a:latin typeface="Amiri" pitchFamily="2" charset="-78"/>
+                <a:ea typeface="Amiri" pitchFamily="2" charset="-78"/>
                 <a:cs typeface="Amiri" pitchFamily="2" charset="-78"/>
               </a:rPr>
               <a:t>تُؤَثِّرُ كَثِيرًا؛ مَثَلًا، عِنْدَمَا اخْتَرْتُ مَوَادِّي، فَكَّرْتُ فِي رَأْيِ أُسْرَتِي، لِأَنَّ القَرَارَ عِنْدَنَا عَائِلِيٌّ أَكْثَرَ مِنْهُ فَرْدِيٌّ.</a:t>
@@ -27238,6 +27440,7 @@
                   <a:srgbClr val="1B3B6F"/>
                 </a:solidFill>
                 <a:latin typeface="Amiri" pitchFamily="2" charset="-78"/>
+                <a:ea typeface="Amiri" pitchFamily="2" charset="-78"/>
                 <a:cs typeface="Amiri" pitchFamily="2" charset="-78"/>
               </a:rPr>
               <a:t>كَيْفَ تُؤَثِّرُ ثَقَافَتُكَ فِي قَرَارَاتِكَ؟</a:t>
@@ -27341,6 +27544,7 @@
                   <a:srgbClr val="1B3B6F"/>
                 </a:solidFill>
                 <a:latin typeface="Amiri" pitchFamily="2" charset="-78"/>
+                <a:ea typeface="Amiri" pitchFamily="2" charset="-78"/>
                 <a:cs typeface="Amiri" pitchFamily="2" charset="-78"/>
               </a:rPr>
               <a:t>لَوْ عِشْتُ هُنَاكَ، لَكَانَتْ لُغَتِيَ العَرَبِيَّةُ أَقْوَى، وَلَعَرَفْتُ أَقَارِبِي أَكْثَرَ، لٰكِنَّ قِيَمِي سَتَبْقَى كَمَا هِيَ.</a:t>
@@ -27420,6 +27624,7 @@
                   <a:srgbClr val="1B3B6F"/>
                 </a:solidFill>
                 <a:latin typeface="Amiri" pitchFamily="2" charset="-78"/>
+                <a:ea typeface="Amiri" pitchFamily="2" charset="-78"/>
                 <a:cs typeface="Amiri" pitchFamily="2" charset="-78"/>
               </a:rPr>
               <a:t>لَوْ عِشْتَ فِي بَلَدِ أَجْدَادِكَ، هَلْ سَتَكُونُ شَخْصًا مُخْتَلِفًا؟</a:t>
@@ -27629,6 +27834,7 @@
                   <a:srgbClr val="D4AF37"/>
                 </a:solidFill>
                 <a:latin typeface="Amiri" pitchFamily="2" charset="-78"/>
+                <a:ea typeface="Amiri" pitchFamily="2" charset="-78"/>
                 <a:cs typeface="Amiri" pitchFamily="2" charset="-78"/>
               </a:rPr>
               <a:t>م</a:t>
@@ -27949,6 +28155,7 @@
                   <a:srgbClr val="8A6D1E"/>
                 </a:solidFill>
                 <a:latin typeface="Amiri" pitchFamily="2" charset="-78"/>
+                <a:ea typeface="Amiri" pitchFamily="2" charset="-78"/>
                 <a:cs typeface="Amiri" pitchFamily="2" charset="-78"/>
               </a:rPr>
               <a:t>قَيِّمْ عَمَلَكَ</a:t>
@@ -29193,6 +29400,7 @@
                   <a:srgbClr val="FFFFFF"/>
                 </a:solidFill>
                 <a:latin typeface="Amiri" pitchFamily="2" charset="-78"/>
+                <a:ea typeface="Amiri" pitchFamily="2" charset="-78"/>
                 <a:cs typeface="Amiri" pitchFamily="2" charset="-78"/>
               </a:rPr>
               <a:t>أَحْسَنْتُمْ! إِلَى اللِّقَاءِ</a:t>
@@ -29345,6 +29553,7 @@
                   <a:srgbClr val="D4AF37"/>
                 </a:solidFill>
                 <a:latin typeface="Amiri" pitchFamily="2" charset="-78"/>
+                <a:ea typeface="Amiri" pitchFamily="2" charset="-78"/>
                 <a:cs typeface="Amiri" pitchFamily="2" charset="-78"/>
               </a:rPr>
               <a:t>وَرْشَةُ الكِتَابَةِ</a:t>
@@ -29478,6 +29687,7 @@
                   <a:srgbClr val="D4AF37"/>
                 </a:solidFill>
                 <a:latin typeface="Amiri" pitchFamily="2" charset="-78"/>
+                <a:ea typeface="Amiri" pitchFamily="2" charset="-78"/>
                 <a:cs typeface="Amiri" pitchFamily="2" charset="-78"/>
               </a:rPr>
               <a:t>م</a:t>
@@ -29798,6 +30008,7 @@
                   <a:srgbClr val="8A6D1E"/>
                 </a:solidFill>
                 <a:latin typeface="Amiri" pitchFamily="2" charset="-78"/>
+                <a:ea typeface="Amiri" pitchFamily="2" charset="-78"/>
                 <a:cs typeface="Amiri" pitchFamily="2" charset="-78"/>
               </a:rPr>
               <a:t>خَرِيطَةُ الوَرْشَةِ</a:t>
@@ -30112,6 +30323,7 @@
                   <a:srgbClr val="1B3B6F"/>
                 </a:solidFill>
                 <a:latin typeface="Amiri" pitchFamily="2" charset="-78"/>
+                <a:ea typeface="Amiri" pitchFamily="2" charset="-78"/>
                 <a:cs typeface="Amiri" pitchFamily="2" charset="-78"/>
               </a:rPr>
               <a:t>كَيْفَ</a:t>
@@ -30388,6 +30600,7 @@
                   <a:srgbClr val="1E6B52"/>
                 </a:solidFill>
                 <a:latin typeface="Amiri" pitchFamily="2" charset="-78"/>
+                <a:ea typeface="Amiri" pitchFamily="2" charset="-78"/>
                 <a:cs typeface="Amiri" pitchFamily="2" charset="-78"/>
               </a:rPr>
               <a:t>تَمْثِيلُ الدَّوْرِ</a:t>
@@ -30664,6 +30877,7 @@
                   <a:srgbClr val="8A6D1E"/>
                 </a:solidFill>
                 <a:latin typeface="Amiri" pitchFamily="2" charset="-78"/>
+                <a:ea typeface="Amiri" pitchFamily="2" charset="-78"/>
                 <a:cs typeface="Amiri" pitchFamily="2" charset="-78"/>
               </a:rPr>
               <a:t>النَّمُوذَجُ</a:t>
@@ -30940,6 +31154,7 @@
                   <a:srgbClr val="1E6B52"/>
                 </a:solidFill>
                 <a:latin typeface="Amiri" pitchFamily="2" charset="-78"/>
+                <a:ea typeface="Amiri" pitchFamily="2" charset="-78"/>
                 <a:cs typeface="Amiri" pitchFamily="2" charset="-78"/>
               </a:rPr>
               <a:t>المُحَادَثَةُ</a:t>
@@ -31216,6 +31431,7 @@
                   <a:srgbClr val="8A6D1E"/>
                 </a:solidFill>
                 <a:latin typeface="Amiri" pitchFamily="2" charset="-78"/>
+                <a:ea typeface="Amiri" pitchFamily="2" charset="-78"/>
                 <a:cs typeface="Amiri" pitchFamily="2" charset="-78"/>
               </a:rPr>
               <a:t>قَيِّمْ</a:t>
@@ -31459,6 +31675,7 @@
                   <a:srgbClr val="D4AF37"/>
                 </a:solidFill>
                 <a:latin typeface="Amiri" pitchFamily="2" charset="-78"/>
+                <a:ea typeface="Amiri" pitchFamily="2" charset="-78"/>
                 <a:cs typeface="Amiri" pitchFamily="2" charset="-78"/>
               </a:rPr>
               <a:t>م</a:t>
@@ -31779,6 +31996,7 @@
                   <a:srgbClr val="8A6D1E"/>
                 </a:solidFill>
                 <a:latin typeface="Amiri" pitchFamily="2" charset="-78"/>
+                <a:ea typeface="Amiri" pitchFamily="2" charset="-78"/>
                 <a:cs typeface="Amiri" pitchFamily="2" charset="-78"/>
               </a:rPr>
               <a:t>امْتِحَانُ التَّحَدُّثِ</a:t>
@@ -32403,6 +32621,7 @@
                   <a:srgbClr val="1B3B6F"/>
                 </a:solidFill>
                 <a:latin typeface="Amiri" pitchFamily="2" charset="-78"/>
+                <a:ea typeface="Amiri" pitchFamily="2" charset="-78"/>
                 <a:cs typeface="Amiri" pitchFamily="2" charset="-78"/>
               </a:rPr>
               <a:t>عَفْوًا، هَلْ يُمْكِنُ أَنْ تُعِيدَ السُّؤَالَ؟</a:t>
@@ -32502,6 +32721,7 @@
                   <a:srgbClr val="1B3B6F"/>
                 </a:solidFill>
                 <a:latin typeface="Amiri" pitchFamily="2" charset="-78"/>
+                <a:ea typeface="Amiri" pitchFamily="2" charset="-78"/>
                 <a:cs typeface="Amiri" pitchFamily="2" charset="-78"/>
               </a:rPr>
               <a:t>لَحْظَةً، دَعْنِي أُفَكِّرُ …</a:t>
@@ -32601,6 +32821,7 @@
                   <a:srgbClr val="1B3B6F"/>
                 </a:solidFill>
                 <a:latin typeface="Amiri" pitchFamily="2" charset="-78"/>
+                <a:ea typeface="Amiri" pitchFamily="2" charset="-78"/>
                 <a:cs typeface="Amiri" pitchFamily="2" charset="-78"/>
               </a:rPr>
               <a:t>أَقْصِدُ …</a:t>
@@ -32772,6 +32993,7 @@
                   <a:srgbClr val="D4AF37"/>
                 </a:solidFill>
                 <a:latin typeface="Amiri" pitchFamily="2" charset="-78"/>
+                <a:ea typeface="Amiri" pitchFamily="2" charset="-78"/>
                 <a:cs typeface="Amiri" pitchFamily="2" charset="-78"/>
               </a:rPr>
               <a:t>م</a:t>
@@ -33092,6 +33314,7 @@
                   <a:srgbClr val="8A6D1E"/>
                 </a:solidFill>
                 <a:latin typeface="Amiri" pitchFamily="2" charset="-78"/>
+                <a:ea typeface="Amiri" pitchFamily="2" charset="-78"/>
                 <a:cs typeface="Amiri" pitchFamily="2" charset="-78"/>
               </a:rPr>
               <a:t>ثَقَافَتِي وَعَادَاتُنَا</a:t>
@@ -33395,6 +33618,7 @@
                   <a:srgbClr val="1B3B6F"/>
                 </a:solidFill>
                 <a:latin typeface="Amiri" pitchFamily="2" charset="-78"/>
+                <a:ea typeface="Amiri" pitchFamily="2" charset="-78"/>
                 <a:cs typeface="Amiri" pitchFamily="2" charset="-78"/>
               </a:rPr>
               <a:t>ثَقَافَةٌ</a:t>
@@ -33552,6 +33776,7 @@
                   <a:srgbClr val="1B3B6F"/>
                 </a:solidFill>
                 <a:latin typeface="Amiri" pitchFamily="2" charset="-78"/>
+                <a:ea typeface="Amiri" pitchFamily="2" charset="-78"/>
                 <a:cs typeface="Amiri" pitchFamily="2" charset="-78"/>
               </a:rPr>
               <a:t>ثَقَافَتِي</a:t>
@@ -33655,6 +33880,7 @@
                   <a:srgbClr val="1B3B6F"/>
                 </a:solidFill>
                 <a:latin typeface="Amiri" pitchFamily="2" charset="-78"/>
+                <a:ea typeface="Amiri" pitchFamily="2" charset="-78"/>
                 <a:cs typeface="Amiri" pitchFamily="2" charset="-78"/>
               </a:rPr>
               <a:t>ثَقَافَاتٌ</a:t>
@@ -33920,6 +34146,7 @@
                   <a:srgbClr val="1B3B6F"/>
                 </a:solidFill>
                 <a:latin typeface="Amiri" pitchFamily="2" charset="-78"/>
+                <a:ea typeface="Amiri" pitchFamily="2" charset="-78"/>
                 <a:cs typeface="Amiri" pitchFamily="2" charset="-78"/>
               </a:rPr>
               <a:t>هُوِيَّةٌ</a:t>
@@ -34077,6 +34304,7 @@
                   <a:srgbClr val="1B3B6F"/>
                 </a:solidFill>
                 <a:latin typeface="Amiri" pitchFamily="2" charset="-78"/>
+                <a:ea typeface="Amiri" pitchFamily="2" charset="-78"/>
                 <a:cs typeface="Amiri" pitchFamily="2" charset="-78"/>
               </a:rPr>
               <a:t>هُوِيَّاتٌ</a:t>
@@ -34180,6 +34408,7 @@
                   <a:srgbClr val="1B3B6F"/>
                 </a:solidFill>
                 <a:latin typeface="Amiri" pitchFamily="2" charset="-78"/>
+                <a:ea typeface="Amiri" pitchFamily="2" charset="-78"/>
                 <a:cs typeface="Amiri" pitchFamily="2" charset="-78"/>
               </a:rPr>
               <a:t>هُوِيَّتُنَا</a:t>
@@ -34445,6 +34674,7 @@
                   <a:srgbClr val="1B3B6F"/>
                 </a:solidFill>
                 <a:latin typeface="Amiri" pitchFamily="2" charset="-78"/>
+                <a:ea typeface="Amiri" pitchFamily="2" charset="-78"/>
                 <a:cs typeface="Amiri" pitchFamily="2" charset="-78"/>
               </a:rPr>
               <a:t>عَادَةٌ</a:t>
@@ -34602,6 +34832,7 @@
                   <a:srgbClr val="1B3B6F"/>
                 </a:solidFill>
                 <a:latin typeface="Amiri" pitchFamily="2" charset="-78"/>
+                <a:ea typeface="Amiri" pitchFamily="2" charset="-78"/>
                 <a:cs typeface="Amiri" pitchFamily="2" charset="-78"/>
               </a:rPr>
               <a:t>عَادَاتُنَا</a:t>
@@ -34705,6 +34936,7 @@
                   <a:srgbClr val="1B3B6F"/>
                 </a:solidFill>
                 <a:latin typeface="Amiri" pitchFamily="2" charset="-78"/>
+                <a:ea typeface="Amiri" pitchFamily="2" charset="-78"/>
                 <a:cs typeface="Amiri" pitchFamily="2" charset="-78"/>
               </a:rPr>
               <a:t>عَادَاتٌ</a:t>
@@ -34970,6 +35202,7 @@
                   <a:srgbClr val="1B3B6F"/>
                 </a:solidFill>
                 <a:latin typeface="Amiri" pitchFamily="2" charset="-78"/>
+                <a:ea typeface="Amiri" pitchFamily="2" charset="-78"/>
                 <a:cs typeface="Amiri" pitchFamily="2" charset="-78"/>
               </a:rPr>
               <a:t>تَقْلِيدٌ</a:t>
@@ -35127,6 +35360,7 @@
                   <a:srgbClr val="1B3B6F"/>
                 </a:solidFill>
                 <a:latin typeface="Amiri" pitchFamily="2" charset="-78"/>
+                <a:ea typeface="Amiri" pitchFamily="2" charset="-78"/>
                 <a:cs typeface="Amiri" pitchFamily="2" charset="-78"/>
               </a:rPr>
               <a:t>تَقْلِيدِيَّةٌ</a:t>
@@ -35230,6 +35464,7 @@
                   <a:srgbClr val="1B3B6F"/>
                 </a:solidFill>
                 <a:latin typeface="Amiri" pitchFamily="2" charset="-78"/>
+                <a:ea typeface="Amiri" pitchFamily="2" charset="-78"/>
                 <a:cs typeface="Amiri" pitchFamily="2" charset="-78"/>
               </a:rPr>
               <a:t>تَقَالِيدُ</a:t>
@@ -35495,6 +35730,7 @@
                   <a:srgbClr val="1B3B6F"/>
                 </a:solidFill>
                 <a:latin typeface="Amiri" pitchFamily="2" charset="-78"/>
+                <a:ea typeface="Amiri" pitchFamily="2" charset="-78"/>
                 <a:cs typeface="Amiri" pitchFamily="2" charset="-78"/>
               </a:rPr>
               <a:t>جُذُورٌ</a:t>
@@ -35652,6 +35888,7 @@
                   <a:srgbClr val="1B3B6F"/>
                 </a:solidFill>
                 <a:latin typeface="Amiri" pitchFamily="2" charset="-78"/>
+                <a:ea typeface="Amiri" pitchFamily="2" charset="-78"/>
                 <a:cs typeface="Amiri" pitchFamily="2" charset="-78"/>
               </a:rPr>
               <a:t>تُرَاثٌ</a:t>
@@ -35755,6 +35992,7 @@
                   <a:srgbClr val="1B3B6F"/>
                 </a:solidFill>
                 <a:latin typeface="Amiri" pitchFamily="2" charset="-78"/>
+                <a:ea typeface="Amiri" pitchFamily="2" charset="-78"/>
                 <a:cs typeface="Amiri" pitchFamily="2" charset="-78"/>
               </a:rPr>
               <a:t>أَجْدَادٌ</a:t>
@@ -36020,6 +36258,7 @@
                   <a:srgbClr val="1B3B6F"/>
                 </a:solidFill>
                 <a:latin typeface="Amiri" pitchFamily="2" charset="-78"/>
+                <a:ea typeface="Amiri" pitchFamily="2" charset="-78"/>
                 <a:cs typeface="Amiri" pitchFamily="2" charset="-78"/>
               </a:rPr>
               <a:t>أَعْتَزُّ بِثَقَافَتِي</a:t>
@@ -36177,6 +36416,7 @@
                   <a:srgbClr val="1B3B6F"/>
                 </a:solidFill>
                 <a:latin typeface="Amiri" pitchFamily="2" charset="-78"/>
+                <a:ea typeface="Amiri" pitchFamily="2" charset="-78"/>
                 <a:cs typeface="Amiri" pitchFamily="2" charset="-78"/>
               </a:rPr>
               <a:t>أَنْتَمِي إِلَى</a:t>
@@ -36280,6 +36520,7 @@
                   <a:srgbClr val="1B3B6F"/>
                 </a:solidFill>
                 <a:latin typeface="Amiri" pitchFamily="2" charset="-78"/>
+                <a:ea typeface="Amiri" pitchFamily="2" charset="-78"/>
                 <a:cs typeface="Amiri" pitchFamily="2" charset="-78"/>
               </a:rPr>
               <a:t>فَخُورٌ · فَخُورَةٌ</a:t>
@@ -36413,6 +36654,7 @@
                   <a:srgbClr val="D4AF37"/>
                 </a:solidFill>
                 <a:latin typeface="Amiri" pitchFamily="2" charset="-78"/>
+                <a:ea typeface="Amiri" pitchFamily="2" charset="-78"/>
                 <a:cs typeface="Amiri" pitchFamily="2" charset="-78"/>
               </a:rPr>
               <a:t>م</a:t>
@@ -36733,6 +36975,7 @@
                   <a:srgbClr val="8A6D1E"/>
                 </a:solidFill>
                 <a:latin typeface="Amiri" pitchFamily="2" charset="-78"/>
+                <a:ea typeface="Amiri" pitchFamily="2" charset="-78"/>
                 <a:cs typeface="Amiri" pitchFamily="2" charset="-78"/>
               </a:rPr>
               <a:t>الرَّأْيُ وَالسَّبَبُ وَالمِثَالُ</a:t>
@@ -37036,6 +37279,7 @@
                   <a:srgbClr val="1B3B6F"/>
                 </a:solidFill>
                 <a:latin typeface="Amiri" pitchFamily="2" charset="-78"/>
+                <a:ea typeface="Amiri" pitchFamily="2" charset="-78"/>
                 <a:cs typeface="Amiri" pitchFamily="2" charset="-78"/>
               </a:rPr>
               <a:t>إِنَّ … · أَنَّ …</a:t>
@@ -37193,6 +37437,7 @@
                   <a:srgbClr val="1B3B6F"/>
                 </a:solidFill>
                 <a:latin typeface="Amiri" pitchFamily="2" charset="-78"/>
+                <a:ea typeface="Amiri" pitchFamily="2" charset="-78"/>
                 <a:cs typeface="Amiri" pitchFamily="2" charset="-78"/>
               </a:rPr>
               <a:t>أَظُنُّ أَنَّ</a:t>
@@ -37296,6 +37541,7 @@
                   <a:srgbClr val="1B3B6F"/>
                 </a:solidFill>
                 <a:latin typeface="Amiri" pitchFamily="2" charset="-78"/>
+                <a:ea typeface="Amiri" pitchFamily="2" charset="-78"/>
                 <a:cs typeface="Amiri" pitchFamily="2" charset="-78"/>
               </a:rPr>
               <a:t>إِنَّ الهُوِيَّةَ مُهِمَّةٌ</a:t>
@@ -37561,6 +37807,7 @@
                   <a:srgbClr val="1B3B6F"/>
                 </a:solidFill>
                 <a:latin typeface="Amiri" pitchFamily="2" charset="-78"/>
+                <a:ea typeface="Amiri" pitchFamily="2" charset="-78"/>
                 <a:cs typeface="Amiri" pitchFamily="2" charset="-78"/>
               </a:rPr>
               <a:t>مَثَلًا · مِثْلُ</a:t>
@@ -37718,6 +37965,7 @@
                   <a:srgbClr val="1B3B6F"/>
                 </a:solidFill>
                 <a:latin typeface="Amiri" pitchFamily="2" charset="-78"/>
+                <a:ea typeface="Amiri" pitchFamily="2" charset="-78"/>
                 <a:cs typeface="Amiri" pitchFamily="2" charset="-78"/>
               </a:rPr>
               <a:t>بِسَبَبِ</a:t>
@@ -37821,6 +38069,7 @@
                   <a:srgbClr val="1B3B6F"/>
                 </a:solidFill>
                 <a:latin typeface="Amiri" pitchFamily="2" charset="-78"/>
+                <a:ea typeface="Amiri" pitchFamily="2" charset="-78"/>
                 <a:cs typeface="Amiri" pitchFamily="2" charset="-78"/>
               </a:rPr>
               <a:t>لِأَنَّ</a:t>
@@ -38086,6 +38335,7 @@
                   <a:srgbClr val="1B3B6F"/>
                 </a:solidFill>
                 <a:latin typeface="Amiri" pitchFamily="2" charset="-78"/>
+                <a:ea typeface="Amiri" pitchFamily="2" charset="-78"/>
                 <a:cs typeface="Amiri" pitchFamily="2" charset="-78"/>
               </a:rPr>
               <a:t>زِيٌّ تَقْلِيدِيٌّ</a:t>
@@ -38243,6 +38493,7 @@
                   <a:srgbClr val="1B3B6F"/>
                 </a:solidFill>
                 <a:latin typeface="Amiri" pitchFamily="2" charset="-78"/>
+                <a:ea typeface="Amiri" pitchFamily="2" charset="-78"/>
                 <a:cs typeface="Amiri" pitchFamily="2" charset="-78"/>
               </a:rPr>
               <a:t>أَلْبَسُ</a:t>
@@ -38346,6 +38597,7 @@
                   <a:srgbClr val="1B3B6F"/>
                 </a:solidFill>
                 <a:latin typeface="Amiri" pitchFamily="2" charset="-78"/>
+                <a:ea typeface="Amiri" pitchFamily="2" charset="-78"/>
                 <a:cs typeface="Amiri" pitchFamily="2" charset="-78"/>
               </a:rPr>
               <a:t>مَلَابِسُ</a:t>
@@ -38611,6 +38863,7 @@
                   <a:srgbClr val="1B3B6F"/>
                 </a:solidFill>
                 <a:latin typeface="Amiri" pitchFamily="2" charset="-78"/>
+                <a:ea typeface="Amiri" pitchFamily="2" charset="-78"/>
                 <a:cs typeface="Amiri" pitchFamily="2" charset="-78"/>
               </a:rPr>
               <a:t>أَكْلَةٌ شَعْبِيَّةٌ</a:t>
@@ -38768,6 +39021,7 @@
                   <a:srgbClr val="1B3B6F"/>
                 </a:solidFill>
                 <a:latin typeface="Amiri" pitchFamily="2" charset="-78"/>
+                <a:ea typeface="Amiri" pitchFamily="2" charset="-78"/>
                 <a:cs typeface="Amiri" pitchFamily="2" charset="-78"/>
               </a:rPr>
               <a:t>أَكْلَةُ جَدَّتِي</a:t>
@@ -38871,6 +39125,7 @@
                   <a:srgbClr val="1B3B6F"/>
                 </a:solidFill>
                 <a:latin typeface="Amiri" pitchFamily="2" charset="-78"/>
+                <a:ea typeface="Amiri" pitchFamily="2" charset="-78"/>
                 <a:cs typeface="Amiri" pitchFamily="2" charset="-78"/>
               </a:rPr>
               <a:t>أَكَلَاتٌ</a:t>
@@ -39136,6 +39391,7 @@
                   <a:srgbClr val="1B3B6F"/>
                 </a:solidFill>
                 <a:latin typeface="Amiri" pitchFamily="2" charset="-78"/>
+                <a:ea typeface="Amiri" pitchFamily="2" charset="-78"/>
                 <a:cs typeface="Amiri" pitchFamily="2" charset="-78"/>
               </a:rPr>
               <a:t>قِيَمٌ</a:t>
@@ -39293,6 +39549,7 @@
                   <a:srgbClr val="1B3B6F"/>
                 </a:solidFill>
                 <a:latin typeface="Amiri" pitchFamily="2" charset="-78"/>
+                <a:ea typeface="Amiri" pitchFamily="2" charset="-78"/>
                 <a:cs typeface="Amiri" pitchFamily="2" charset="-78"/>
               </a:rPr>
               <a:t>الكَرَمُ</a:t>
@@ -39396,6 +39653,7 @@
                   <a:srgbClr val="1B3B6F"/>
                 </a:solidFill>
                 <a:latin typeface="Amiri" pitchFamily="2" charset="-78"/>
+                <a:ea typeface="Amiri" pitchFamily="2" charset="-78"/>
                 <a:cs typeface="Amiri" pitchFamily="2" charset="-78"/>
               </a:rPr>
               <a:t>الاحْتِرَامُ</a:t>
@@ -39661,6 +39919,7 @@
                   <a:srgbClr val="1B3B6F"/>
                 </a:solidFill>
                 <a:latin typeface="Amiri" pitchFamily="2" charset="-78"/>
+                <a:ea typeface="Amiri" pitchFamily="2" charset="-78"/>
                 <a:cs typeface="Amiri" pitchFamily="2" charset="-78"/>
               </a:rPr>
               <a:t>مُخْتَلِفٌ عَنْ</a:t>
@@ -39818,6 +40077,7 @@
                   <a:srgbClr val="1B3B6F"/>
                 </a:solidFill>
                 <a:latin typeface="Amiri" pitchFamily="2" charset="-78"/>
+                <a:ea typeface="Amiri" pitchFamily="2" charset="-78"/>
                 <a:cs typeface="Amiri" pitchFamily="2" charset="-78"/>
               </a:rPr>
               <a:t>مَزِيجٌ</a:t>
@@ -39921,6 +40181,7 @@
                   <a:srgbClr val="1B3B6F"/>
                 </a:solidFill>
                 <a:latin typeface="Amiri" pitchFamily="2" charset="-78"/>
+                <a:ea typeface="Amiri" pitchFamily="2" charset="-78"/>
                 <a:cs typeface="Amiri" pitchFamily="2" charset="-78"/>
               </a:rPr>
               <a:t>يُشْبِهُ</a:t>
@@ -40054,6 +40315,7 @@
                   <a:srgbClr val="D4AF37"/>
                 </a:solidFill>
                 <a:latin typeface="Amiri" pitchFamily="2" charset="-78"/>
+                <a:ea typeface="Amiri" pitchFamily="2" charset="-78"/>
                 <a:cs typeface="Amiri" pitchFamily="2" charset="-78"/>
               </a:rPr>
               <a:t>م</a:t>
@@ -40374,6 +40636,7 @@
                   <a:srgbClr val="8A6D1E"/>
                 </a:solidFill>
                 <a:latin typeface="Amiri" pitchFamily="2" charset="-78"/>
+                <a:ea typeface="Amiri" pitchFamily="2" charset="-78"/>
                 <a:cs typeface="Amiri" pitchFamily="2" charset="-78"/>
               </a:rPr>
               <a:t>فِي الغُرَفِ</a:t>
@@ -41550,6 +41813,7 @@
                   <a:srgbClr val="1B3B6F"/>
                 </a:solidFill>
                 <a:latin typeface="Amiri" pitchFamily="2" charset="-78"/>
+                <a:ea typeface="Amiri" pitchFamily="2" charset="-78"/>
                 <a:cs typeface="Amiri" pitchFamily="2" charset="-78"/>
               </a:rPr>
               <a:t>دَوْرُكَ!</a:t>
@@ -41626,6 +41890,7 @@
                   <a:srgbClr val="1B3B6F"/>
                 </a:solidFill>
                 <a:latin typeface="Amiri" pitchFamily="2" charset="-78"/>
+                <a:ea typeface="Amiri" pitchFamily="2" charset="-78"/>
                 <a:cs typeface="Amiri" pitchFamily="2" charset="-78"/>
               </a:rPr>
               <a:t>أَحْسَنْتَ! / أَحْسَنْتِ!</a:t>
@@ -41702,6 +41967,7 @@
                   <a:srgbClr val="1B3B6F"/>
                 </a:solidFill>
                 <a:latin typeface="Amiri" pitchFamily="2" charset="-78"/>
+                <a:ea typeface="Amiri" pitchFamily="2" charset="-78"/>
                 <a:cs typeface="Amiri" pitchFamily="2" charset="-78"/>
               </a:rPr>
               <a:t>تَكَلَّمْ أَكْثَرَ، مِنْ فَضْلِكَ</a:t>
@@ -41778,6 +42044,7 @@
                   <a:srgbClr val="1B3B6F"/>
                 </a:solidFill>
                 <a:latin typeface="Amiri" pitchFamily="2" charset="-78"/>
+                <a:ea typeface="Amiri" pitchFamily="2" charset="-78"/>
                 <a:cs typeface="Amiri" pitchFamily="2" charset="-78"/>
               </a:rPr>
               <a:t>لِمَاذَا؟</a:t>
@@ -41949,6 +42216,7 @@
                   <a:srgbClr val="D4AF37"/>
                 </a:solidFill>
                 <a:latin typeface="Amiri" pitchFamily="2" charset="-78"/>
+                <a:ea typeface="Amiri" pitchFamily="2" charset="-78"/>
                 <a:cs typeface="Amiri" pitchFamily="2" charset="-78"/>
               </a:rPr>
               <a:t>م</a:t>
@@ -42269,6 +42537,7 @@
                   <a:srgbClr val="8A6D1E"/>
                 </a:solidFill>
                 <a:latin typeface="Amiri" pitchFamily="2" charset="-78"/>
+                <a:ea typeface="Amiri" pitchFamily="2" charset="-78"/>
                 <a:cs typeface="Amiri" pitchFamily="2" charset="-78"/>
               </a:rPr>
               <a:t>نَادِي الثَّقَافَاتِ</a:t>
@@ -42549,6 +42818,7 @@
                   <a:srgbClr val="1B3B6F"/>
                 </a:solidFill>
                 <a:latin typeface="Amiri" pitchFamily="2" charset="-78"/>
+                <a:ea typeface="Amiri" pitchFamily="2" charset="-78"/>
                 <a:cs typeface="Amiri" pitchFamily="2" charset="-78"/>
               </a:rPr>
               <a:t>ثَقَافَتِي … لِأَنَّ أُسْرَتِي مِنْ …</a:t>
@@ -42625,6 +42895,7 @@
                   <a:srgbClr val="1B3B6F"/>
                 </a:solidFill>
                 <a:latin typeface="Amiri" pitchFamily="2" charset="-78"/>
+                <a:ea typeface="Amiri" pitchFamily="2" charset="-78"/>
                 <a:cs typeface="Amiri" pitchFamily="2" charset="-78"/>
               </a:rPr>
               <a:t>أَهْلًا! مَا ثَقَافَتُكَ؟</a:t>
@@ -42793,6 +43064,7 @@
                   <a:srgbClr val="1B3B6F"/>
                 </a:solidFill>
                 <a:latin typeface="Amiri" pitchFamily="2" charset="-78"/>
+                <a:ea typeface="Amiri" pitchFamily="2" charset="-78"/>
                 <a:cs typeface="Amiri" pitchFamily="2" charset="-78"/>
               </a:rPr>
               <a:t>أَكْلَتُنَا الشَّعْبِيَّةُ …</a:t>
@@ -42869,6 +43141,7 @@
                   <a:srgbClr val="1B3B6F"/>
                 </a:solidFill>
                 <a:latin typeface="Amiri" pitchFamily="2" charset="-78"/>
+                <a:ea typeface="Amiri" pitchFamily="2" charset="-78"/>
                 <a:cs typeface="Amiri" pitchFamily="2" charset="-78"/>
               </a:rPr>
               <a:t>مَا أَكْلَتُكُمُ الشَّعْبِيَّةُ؟</a:t>
@@ -43037,6 +43310,7 @@
                   <a:srgbClr val="1B3B6F"/>
                 </a:solidFill>
                 <a:latin typeface="Amiri" pitchFamily="2" charset="-78"/>
+                <a:ea typeface="Amiri" pitchFamily="2" charset="-78"/>
                 <a:cs typeface="Amiri" pitchFamily="2" charset="-78"/>
               </a:rPr>
               <a:t>نَعَمْ، … مِثْلُ …</a:t>
@@ -43113,6 +43387,7 @@
                   <a:srgbClr val="1B3B6F"/>
                 </a:solidFill>
                 <a:latin typeface="Amiri" pitchFamily="2" charset="-78"/>
+                <a:ea typeface="Amiri" pitchFamily="2" charset="-78"/>
                 <a:cs typeface="Amiri" pitchFamily="2" charset="-78"/>
               </a:rPr>
               <a:t>وَهَلْ عِنْدَكُمْ زِيٌّ تَقْلِيدِيٌّ؟</a:t>
@@ -43281,6 +43556,7 @@
                   <a:srgbClr val="1B3B6F"/>
                 </a:solidFill>
                 <a:latin typeface="Amiri" pitchFamily="2" charset="-78"/>
+                <a:ea typeface="Amiri" pitchFamily="2" charset="-78"/>
                 <a:cs typeface="Amiri" pitchFamily="2" charset="-78"/>
               </a:rPr>
               <a:t>فِي أَيِّ يَوْمٍ …؟</a:t>
@@ -43357,6 +43633,7 @@
                   <a:srgbClr val="1B3B6F"/>
                 </a:solidFill>
                 <a:latin typeface="Amiri" pitchFamily="2" charset="-78"/>
+                <a:ea typeface="Amiri" pitchFamily="2" charset="-78"/>
                 <a:cs typeface="Amiri" pitchFamily="2" charset="-78"/>
               </a:rPr>
               <a:t>نَلْتَقِي كُلَّ أُسْبُوعٍ.</a:t>
@@ -43525,6 +43802,7 @@
                   <a:srgbClr val="1B3B6F"/>
                 </a:solidFill>
                 <a:latin typeface="Amiri" pitchFamily="2" charset="-78"/>
+                <a:ea typeface="Amiri" pitchFamily="2" charset="-78"/>
                 <a:cs typeface="Amiri" pitchFamily="2" charset="-78"/>
               </a:rPr>
               <a:t>أَهَمُّ شَيْءٍ … لِأَنَّ …</a:t>
@@ -43601,6 +43879,7 @@
                   <a:srgbClr val="1B3B6F"/>
                 </a:solidFill>
                 <a:latin typeface="Amiri" pitchFamily="2" charset="-78"/>
+                <a:ea typeface="Amiri" pitchFamily="2" charset="-78"/>
                 <a:cs typeface="Amiri" pitchFamily="2" charset="-78"/>
               </a:rPr>
               <a:t>يَوْمَ الخَمِيسِ. مَا أَهَمُّ شَيْءٍ فِي ثَقَافَتِكَ؟</a:t>
@@ -43875,6 +44154,7 @@
                   <a:srgbClr val="D4AF37"/>
                 </a:solidFill>
                 <a:latin typeface="Amiri" pitchFamily="2" charset="-78"/>
+                <a:ea typeface="Amiri" pitchFamily="2" charset="-78"/>
                 <a:cs typeface="Amiri" pitchFamily="2" charset="-78"/>
               </a:rPr>
               <a:t>م</a:t>
@@ -44195,6 +44475,7 @@
                   <a:srgbClr val="8A6D1E"/>
                 </a:solidFill>
                 <a:latin typeface="Amiri" pitchFamily="2" charset="-78"/>
+                <a:ea typeface="Amiri" pitchFamily="2" charset="-78"/>
                 <a:cs typeface="Amiri" pitchFamily="2" charset="-78"/>
               </a:rPr>
               <a:t>التَّحْضِيرُ لِلْيَوْمِ الدُّوَلِيِّ</a:t>
@@ -44475,6 +44756,7 @@
                   <a:srgbClr val="1B3B6F"/>
                 </a:solidFill>
                 <a:latin typeface="Amiri" pitchFamily="2" charset="-78"/>
+                <a:ea typeface="Amiri" pitchFamily="2" charset="-78"/>
                 <a:cs typeface="Amiri" pitchFamily="2" charset="-78"/>
               </a:rPr>
               <a:t>سَأُحْضِرُ … وَ…</a:t>
@@ -44551,6 +44833,7 @@
                   <a:srgbClr val="1B3B6F"/>
                 </a:solidFill>
                 <a:latin typeface="Amiri" pitchFamily="2" charset="-78"/>
+                <a:ea typeface="Amiri" pitchFamily="2" charset="-78"/>
                 <a:cs typeface="Amiri" pitchFamily="2" charset="-78"/>
               </a:rPr>
               <a:t>مَاذَا سَتُحْضِرُ إِلَى اليَوْمِ الدُّوَلِيِّ؟</a:t>
@@ -44719,6 +45002,7 @@
                   <a:srgbClr val="1B3B6F"/>
                 </a:solidFill>
                 <a:latin typeface="Amiri" pitchFamily="2" charset="-78"/>
+                <a:ea typeface="Amiri" pitchFamily="2" charset="-78"/>
                 <a:cs typeface="Amiri" pitchFamily="2" charset="-78"/>
               </a:rPr>
               <a:t>سَأَلْبَسُ … لَوْنُهُ …</a:t>
@@ -44795,6 +45079,7 @@
                   <a:srgbClr val="1B3B6F"/>
                 </a:solidFill>
                 <a:latin typeface="Amiri" pitchFamily="2" charset="-78"/>
+                <a:ea typeface="Amiri" pitchFamily="2" charset="-78"/>
                 <a:cs typeface="Amiri" pitchFamily="2" charset="-78"/>
               </a:rPr>
               <a:t>وَمَاذَا سَتَلْبَسُ؟</a:t>
@@ -44963,6 +45248,7 @@
                   <a:srgbClr val="1B3B6F"/>
                 </a:solidFill>
                 <a:latin typeface="Amiri" pitchFamily="2" charset="-78"/>
+                <a:ea typeface="Amiri" pitchFamily="2" charset="-78"/>
                 <a:cs typeface="Amiri" pitchFamily="2" charset="-78"/>
               </a:rPr>
               <a:t>لِأَنَّ … ؛ إِنَّ … جُزْءٌ مِنْ …</a:t>
@@ -45039,6 +45325,7 @@
                   <a:srgbClr val="1B3B6F"/>
                 </a:solidFill>
                 <a:latin typeface="Amiri" pitchFamily="2" charset="-78"/>
+                <a:ea typeface="Amiri" pitchFamily="2" charset="-78"/>
                 <a:cs typeface="Amiri" pitchFamily="2" charset="-78"/>
               </a:rPr>
               <a:t>لِمَاذَا اخْتَرْتَ هٰذِهِ الأَشْيَاءَ؟</a:t>
@@ -45142,6 +45429,7 @@
                   <a:srgbClr val="1B3B6F"/>
                 </a:solidFill>
                 <a:latin typeface="Amiri" pitchFamily="2" charset="-78"/>
+                <a:ea typeface="Amiri" pitchFamily="2" charset="-78"/>
                 <a:cs typeface="Amiri" pitchFamily="2" charset="-78"/>
               </a:rPr>
               <a:t>هَلْ …؟ وَمَتَى …؟</a:t>
@@ -45218,6 +45506,7 @@
                   <a:srgbClr val="1B3B6F"/>
                 </a:solidFill>
                 <a:latin typeface="Amiri" pitchFamily="2" charset="-78"/>
+                <a:ea typeface="Amiri" pitchFamily="2" charset="-78"/>
                 <a:cs typeface="Amiri" pitchFamily="2" charset="-78"/>
               </a:rPr>
               <a:t>سَيَكُونُ هُنَاكَ طُلَّابٌ مِنْ ثَلَاثِينَ بَلَدًا.</a:t>
@@ -45321,6 +45610,7 @@
                   <a:srgbClr val="1B3B6F"/>
                 </a:solidFill>
                 <a:latin typeface="Amiri" pitchFamily="2" charset="-78"/>
+                <a:ea typeface="Amiri" pitchFamily="2" charset="-78"/>
                 <a:cs typeface="Amiri" pitchFamily="2" charset="-78"/>
               </a:rPr>
               <a:t>نَعَمْ، أَعْتَزُّ بِهَا لِأَنَّ … مَثَلًا …</a:t>
@@ -45397,6 +45687,7 @@
                   <a:srgbClr val="1B3B6F"/>
                 </a:solidFill>
                 <a:latin typeface="Amiri" pitchFamily="2" charset="-78"/>
+                <a:ea typeface="Amiri" pitchFamily="2" charset="-78"/>
                 <a:cs typeface="Amiri" pitchFamily="2" charset="-78"/>
               </a:rPr>
               <a:t>نَعَمْ، فِي الثَّانِيَةِ. هَلْ أَنْتَ فَخُورٌ بِثَقَافَتِكَ؟</a:t>
@@ -45571,13 +45862,9 @@
     <a:fontScheme name="Office">
       <a:majorFont>
         <a:latin typeface="Calibri Light" panose="020F0302020204030204"/>
-        <a:ea typeface=""/>
-        <a:cs typeface=""/>
-        <a:font script="Jpan" typeface="游ゴシック Light"/>
-        <a:font script="Hang" typeface="맑은 고딕"/>
-        <a:font script="Hans" typeface="等线 Light"/>
-        <a:font script="Hant" typeface="新細明體"/>
-        <a:font script="Arab" typeface="Times New Roman"/>
+        <a:ea typeface="Amiri" pitchFamily="2" charset="-78"/>
+        <a:cs typeface="Amiri" pitchFamily="2" charset="-78"/>
+        <a:font script="Arab" typeface="Amiri"/>
         <a:font script="Hebr" typeface="Times New Roman"/>
         <a:font script="Thai" typeface="Angsana New"/>
         <a:font script="Ethi" typeface="Nyala"/>
@@ -45623,13 +45910,9 @@
       </a:majorFont>
       <a:minorFont>
         <a:latin typeface="Calibri" panose="020F0502020204030204"/>
-        <a:ea typeface=""/>
-        <a:cs typeface=""/>
-        <a:font script="Jpan" typeface="游ゴシック"/>
-        <a:font script="Hang" typeface="맑은 고딕"/>
-        <a:font script="Hans" typeface="等线"/>
-        <a:font script="Hant" typeface="新細明體"/>
-        <a:font script="Arab" typeface="Arial"/>
+        <a:ea typeface="Amiri" pitchFamily="2" charset="-78"/>
+        <a:cs typeface="Amiri" pitchFamily="2" charset="-78"/>
+        <a:font script="Arab" typeface="Amiri"/>
         <a:font script="Hebr" typeface="Arial"/>
         <a:font script="Thai" typeface="Cordia New"/>
         <a:font script="Ethi" typeface="Nyala"/>
